--- a/_implementation-notes/evening-series/FotH Evening Session 14 Slides DRAFT v1.pptx
+++ b/_implementation-notes/evening-series/FotH Evening Session 14 Slides DRAFT v1.pptx
@@ -10,11 +10,13 @@
   <p:sldIdLst>
     <p:sldId id="256" r:id="rId2"/>
     <p:sldId id="300" r:id="rId178"/>
+    <p:sldId id="538" r:id="rId18"/>
     <p:sldId id="301" r:id="rId179"/>
     <p:sldId id="446" r:id="rId180"/>
     <p:sldId id="447" r:id="rId181"/>
     <p:sldId id="448" r:id="rId182"/>
-    <p:sldId id="537" r:id="rId183"/>
+    <p:sldId id="539" r:id="rId19"/>
+    <p:sldId id="540" r:id="rId20"/>
     <p:sldId id="449" r:id="rId184"/>
     <p:sldId id="450" r:id="rId185"/>
   </p:sldIdLst>
@@ -746,6 +748,214 @@
 </p:notes>
 </file>
 
+<file path=ppt/notesSlides/notesSlide10.xml><?xml version="1.0" encoding="utf-8"?>
+<p:notes xmlns:a="http://schemas.openxmlformats.org/drawingml/2006/main" xmlns:p="http://schemas.openxmlformats.org/presentationml/2006/main" xmlns:r="http://schemas.openxmlformats.org/officeDocument/2006/relationships">
+  <p:cSld>
+    <p:spTree>
+      <p:nvGrpSpPr>
+        <p:cNvPr id="1" name=""/>
+        <p:cNvGrpSpPr/>
+        <p:nvPr/>
+      </p:nvGrpSpPr>
+      <p:grpSpPr>
+        <a:xfrm>
+          <a:off x="0" y="0"/>
+          <a:ext cx="0" cy="0"/>
+          <a:chOff x="0" y="0"/>
+          <a:chExt cx="0" cy="0"/>
+        </a:xfrm>
+      </p:grpSpPr>
+      <p:sp>
+        <p:nvSpPr>
+          <p:cNvPr id="2" name="Notes Placeholder 1"/>
+          <p:cNvSpPr>
+            <a:spLocks noGrp="1"/>
+          </p:cNvSpPr>
+          <p:nvPr>
+            <p:ph type="body" idx="1"/>
+          </p:nvPr>
+        </p:nvSpPr>
+        <p:spPr/>
+        <p:txBody>
+          <a:bodyPr/>
+          <a:lstStyle/>
+          <a:p>
+            <a:r>
+              <a:t>S14 · WELCOME · LEAD: CONTAINER HOLDER · GROUNDING — every session opens on this map</a:t>
+            </a:r>
+          </a:p>
+          <a:p>
+            <a:r>
+              <a:t>BEATS:</a:t>
+            </a:r>
+          </a:p>
+          <a:p>
+            <a:r>
+              <a:t>1. Locate tonight on the map, plainly: Session 14 returns to the second and third boxes — Others and God — walked again, teen-led. Each connection makes the next one real (Matt. 22:37–40).</a:t>
+            </a:r>
+          </a:p>
+          <a:p>
+            <a:r>
+              <a:t>2. The four boxes are one journey — each connection makes the next one real — rooted in the two great commandments: love God, love neighbor (Matt 22:37–40).</a:t>
+            </a:r>
+          </a:p>
+          <a:p>
+            <a:r>
+              <a:t>3. This is also the 'where we are on the map' minute the welcome owes any newcomer.</a:t>
+            </a:r>
+          </a:p>
+          <a:p>
+            <a:r>
+              <a:t>CUES: Two minutes at most; then tonight's road.</a:t>
+            </a:r>
+          </a:p>
+        </p:txBody>
+      </p:sp>
+    </p:spTree>
+  </p:cSld>
+  <p:clrMapOvr>
+    <a:masterClrMapping/>
+  </p:clrMapOvr>
+</p:notes>
+</file>
+
+<file path=ppt/notesSlides/notesSlide11.xml><?xml version="1.0" encoding="utf-8"?>
+<p:notes xmlns:a="http://schemas.openxmlformats.org/drawingml/2006/main" xmlns:p="http://schemas.openxmlformats.org/presentationml/2006/main" xmlns:r="http://schemas.openxmlformats.org/officeDocument/2006/relationships">
+  <p:cSld>
+    <p:spTree>
+      <p:nvGrpSpPr>
+        <p:cNvPr id="1" name=""/>
+        <p:cNvGrpSpPr/>
+        <p:nvPr/>
+      </p:nvGrpSpPr>
+      <p:grpSpPr>
+        <a:xfrm>
+          <a:off x="0" y="0"/>
+          <a:ext cx="0" cy="0"/>
+          <a:chOff x="0" y="0"/>
+          <a:chExt cx="0" cy="0"/>
+        </a:xfrm>
+      </p:grpSpPr>
+      <p:sp>
+        <p:nvSpPr>
+          <p:cNvPr id="2" name="Notes Placeholder 1"/>
+          <p:cNvSpPr>
+            <a:spLocks noGrp="1"/>
+          </p:cNvSpPr>
+          <p:nvPr>
+            <p:ph type="body" idx="1"/>
+          </p:nvPr>
+        </p:nvSpPr>
+        <p:spPr/>
+        <p:txBody>
+          <a:bodyPr/>
+          <a:lstStyle/>
+          <a:p>
+            <a:r>
+              <a:t>S14 · COMMISSIONING · LEAD: CONTENT PRESENTER</a:t>
+            </a:r>
+          </a:p>
+          <a:p>
+            <a:r>
+              <a:t>BEATS:</a:t>
+            </a:r>
+          </a:p>
+          <a:p>
+            <a:r>
+              <a:t>1. The sheet on the screen is the sheet in their hands — walk it, don't read it.</a:t>
+            </a:r>
+          </a:p>
+          <a:p>
+            <a:r>
+              <a:t>2. The standing rhythm first: the morning question, the evening journal line — one box per day on the week-grids.</a:t>
+            </a:r>
+          </a:p>
+          <a:p>
+            <a:r>
+              <a:t>3. A missed box is never a failure — it is an invitation to return.</a:t>
+            </a:r>
+          </a:p>
+          <a:p>
+            <a:r>
+              <a:t>CUES: The four parts are the next slide.</a:t>
+            </a:r>
+          </a:p>
+        </p:txBody>
+      </p:sp>
+    </p:spTree>
+  </p:cSld>
+  <p:clrMapOvr>
+    <a:masterClrMapping/>
+  </p:clrMapOvr>
+</p:notes>
+</file>
+
+<file path=ppt/notesSlides/notesSlide12.xml><?xml version="1.0" encoding="utf-8"?>
+<p:notes xmlns:a="http://schemas.openxmlformats.org/drawingml/2006/main" xmlns:p="http://schemas.openxmlformats.org/presentationml/2006/main" xmlns:r="http://schemas.openxmlformats.org/officeDocument/2006/relationships">
+  <p:cSld>
+    <p:spTree>
+      <p:nvGrpSpPr>
+        <p:cNvPr id="1" name=""/>
+        <p:cNvGrpSpPr/>
+        <p:nvPr/>
+      </p:nvGrpSpPr>
+      <p:grpSpPr>
+        <a:xfrm>
+          <a:off x="0" y="0"/>
+          <a:ext cx="0" cy="0"/>
+          <a:chOff x="0" y="0"/>
+          <a:chExt cx="0" cy="0"/>
+        </a:xfrm>
+      </p:grpSpPr>
+      <p:sp>
+        <p:nvSpPr>
+          <p:cNvPr id="2" name="Notes Placeholder 1"/>
+          <p:cNvSpPr>
+            <a:spLocks noGrp="1"/>
+          </p:cNvSpPr>
+          <p:nvPr>
+            <p:ph type="body" idx="1"/>
+          </p:nvPr>
+        </p:nvSpPr>
+        <p:spPr/>
+        <p:txBody>
+          <a:bodyPr/>
+          <a:lstStyle/>
+          <a:p>
+            <a:r>
+              <a:t>S14 · COMMISSIONING · LEAD: CONTENT PRESENTER</a:t>
+            </a:r>
+          </a:p>
+          <a:p>
+            <a:r>
+              <a:t>BEATS:</a:t>
+            </a:r>
+          </a:p>
+          <a:p>
+            <a:r>
+              <a:t>1. The four parts, in order: the homework practice, week one; the end-of-week-one check-in; the homework practice, week two; one sentence of preparation.</a:t>
+            </a:r>
+          </a:p>
+          <a:p>
+            <a:r>
+              <a:t>2. Check-in partners are named aloud before leaving this slide — the sheet has the line to write the name.</a:t>
+            </a:r>
+          </a:p>
+          <a:p>
+            <a:r>
+              <a:t>GUARD: The sheet-walk, not a re-teach.</a:t>
+            </a:r>
+          </a:p>
+        </p:txBody>
+      </p:sp>
+    </p:spTree>
+  </p:cSld>
+  <p:clrMapOvr>
+    <a:masterClrMapping/>
+  </p:clrMapOvr>
+</p:notes>
+</file>
+
 <file path=ppt/notesSlides/notesSlide175.xml><?xml version="1.0" encoding="utf-8"?>
 <p:notes xmlns:a="http://schemas.openxmlformats.org/drawingml/2006/main" xmlns:r="http://schemas.openxmlformats.org/officeDocument/2006/relationships" xmlns:p="http://schemas.openxmlformats.org/presentationml/2006/main">
   <p:cSld>
@@ -897,20 +1107,22 @@
           <a:lstStyle/>
           <a:p>
             <a:r>
-              <a:rPr lang="en-US" sz="1200"/>
               <a:t>S14 · 7:00–7:08 · LEAD: CONTAINER HOLDER · TEEN-LED</a:t>
             </a:r>
           </a:p>
           <a:p>
             <a:r>
-              <a:rPr lang="en-US" sz="1200"/>
               <a:t>BEATS: 1. The leading teen opens: phones away, blessing first. 2. Option 1: the short container restatement — Safe, Present, Clear, Intentional — then straight to the check-in word. Option 2: this IS half the rep — the full protocol from memory: standing circle, one-word check-in, put out / bring in, the spoken commitment, prayer naming the Holy Spirit. Measure completeness, not polish.</a:t>
             </a:r>
           </a:p>
           <a:p>
             <a:r>
-              <a:rPr lang="en-US" sz="1200"/>
               <a:t>CUES: From the teen's first word, sit back outside the circle — the room learns who is leading from where the adults look. If the teen freezes: the catch counts silently to ten, steps in warm and seamless at the next one-liner, offers the lead back at the next step. No flag on the play.</a:t>
+            </a:r>
+          </a:p>
+          <a:p>
+            <a:r>
+              <a:t>PAIR LEAD: name the leading pair in the welcome — two leaders hold tonight, and the room will see the evening handed back and forth between them; that is the design. The pair practices the session together beforehand.</a:t>
             </a:r>
           </a:p>
         </p:txBody>
@@ -1035,65 +1247,6 @@
             <a:r>
               <a:rPr lang="en-US" sz="1200"/>
               <a:t>GUARD: Today is not filler between the Mission week and the Rhythm week — it is the mechanism. Say so.</a:t>
-            </a:r>
-          </a:p>
-        </p:txBody>
-      </p:sp>
-    </p:spTree>
-  </p:cSld>
-  <p:clrMapOvr>
-    <a:masterClrMapping/>
-  </p:clrMapOvr>
-</p:notes>
-</file>
-
-<file path=ppt/notesSlides/notesSlide180.xml><?xml version="1.0" encoding="utf-8"?>
-<p:notes xmlns:a="http://schemas.openxmlformats.org/drawingml/2006/main" xmlns:r="http://schemas.openxmlformats.org/officeDocument/2006/relationships" xmlns:p="http://schemas.openxmlformats.org/presentationml/2006/main">
-  <p:cSld>
-    <p:spTree>
-      <p:nvGrpSpPr>
-        <p:cNvPr id="1" name=""/>
-        <p:cNvGrpSpPr/>
-        <p:nvPr/>
-      </p:nvGrpSpPr>
-      <p:grpSpPr>
-        <a:xfrm>
-          <a:off x="0" y="0"/>
-          <a:ext cx="0" cy="0"/>
-          <a:chOff x="0" y="0"/>
-          <a:chExt cx="0" cy="0"/>
-        </a:xfrm>
-      </p:grpSpPr>
-      <p:sp>
-        <p:nvSpPr>
-          <p:cNvPr id="2" name="Notes Placeholder 1"/>
-          <p:cNvSpPr>
-            <a:spLocks noGrp="1"/>
-          </p:cNvSpPr>
-          <p:nvPr>
-            <p:ph type="body" idx="1"/>
-          </p:nvPr>
-        </p:nvSpPr>
-        <p:spPr/>
-        <p:txBody>
-          <a:bodyPr/>
-          <a:lstStyle/>
-          <a:p>
-            <a:r>
-              <a:rPr lang="en-US" sz="1200"/>
-              <a:t>W14 · ~5:12–5:19 · TEEN-LED (the merge block)</a:t>
-            </a:r>
-          </a:p>
-          <a:p>
-            <a:r>
-              <a:rPr lang="en-US" sz="1200"/>
-              <a:t>BEATS: 1. The daily rhythm continues: the morning question, the session note, PROAPT one short passage. 2. Option 1 nights: the Tell you gave your pair, said once more at your own table this week. Option 2 nights: the family deck comes off the shelf once — one card, ten minutes; the car works, the table works. 3. A missed box is never failure — an invitation to return.</a:t>
-            </a:r>
-          </a:p>
-          <a:p>
-            <a:r>
-              <a:rPr lang="en-US" sz="1200"/>
-              <a:t>CUES: This lands in the teen's merge block (5:16 in Option 1, 5:12 in Option 2) — the teen says it, not you.</a:t>
             </a:r>
           </a:p>
         </p:txBody>
@@ -4423,7 +4576,596 @@
 </p:sld>
 </file>
 
-<file path=ppt/slides/slide177.xml><?xml version="1.0" encoding="utf-8"?>
+<file path=ppt/slides/slide10.xml><?xml version="1.0" encoding="utf-8"?>
+<p:sld xmlns:a="http://schemas.openxmlformats.org/drawingml/2006/main" xmlns:p="http://schemas.openxmlformats.org/presentationml/2006/main" xmlns:r="http://schemas.openxmlformats.org/officeDocument/2006/relationships">
+  <p:cSld>
+    <p:spTree>
+      <p:nvGrpSpPr>
+        <p:cNvPr id="1" name=""/>
+        <p:cNvGrpSpPr/>
+        <p:nvPr/>
+      </p:nvGrpSpPr>
+      <p:grpSpPr/>
+      <p:sp>
+        <p:nvSpPr>
+          <p:cNvPr id="2" name="Rectangle 1"/>
+          <p:cNvSpPr/>
+          <p:nvPr/>
+        </p:nvSpPr>
+        <p:spPr>
+          <a:xfrm>
+            <a:off x="0" y="0"/>
+            <a:ext cx="12192000" cy="6858000"/>
+          </a:xfrm>
+          <a:prstGeom prst="rect">
+            <a:avLst/>
+          </a:prstGeom>
+          <a:solidFill>
+            <a:srgbClr val="FFFFFF"/>
+          </a:solidFill>
+          <a:ln>
+            <a:noFill/>
+          </a:ln>
+          <a:effectLst/>
+        </p:spPr>
+        <p:style>
+          <a:lnRef idx="1">
+            <a:schemeClr val="accent1"/>
+          </a:lnRef>
+          <a:fillRef idx="3">
+            <a:schemeClr val="accent1"/>
+          </a:fillRef>
+          <a:effectRef idx="2">
+            <a:schemeClr val="accent1"/>
+          </a:effectRef>
+          <a:fontRef idx="minor">
+            <a:schemeClr val="lt1"/>
+          </a:fontRef>
+        </p:style>
+        <p:txBody>
+          <a:bodyPr rtlCol="0" anchor="ctr"/>
+          <a:lstStyle/>
+          <a:p>
+            <a:pPr algn="ctr"/>
+          </a:p>
+        </p:txBody>
+      </p:sp>
+      <p:sp>
+        <p:nvSpPr>
+          <p:cNvPr id="3" name="TextBox 2"/>
+          <p:cNvSpPr txBox="1"/>
+          <p:nvPr/>
+        </p:nvSpPr>
+        <p:spPr>
+          <a:xfrm>
+            <a:off x="822960" y="502920"/>
+            <a:ext cx="10515600" cy="822960"/>
+          </a:xfrm>
+          <a:prstGeom prst="rect">
+            <a:avLst/>
+          </a:prstGeom>
+          <a:noFill/>
+        </p:spPr>
+        <p:txBody>
+          <a:bodyPr wrap="square">
+            <a:spAutoFit/>
+          </a:bodyPr>
+          <a:lstStyle/>
+          <a:p>
+            <a:r>
+              <a:rPr sz="2800" b="1">
+                <a:solidFill>
+                  <a:srgbClr val="2C5F2D"/>
+                </a:solidFill>
+                <a:latin typeface="Cambria"/>
+              </a:rPr>
+              <a:t>Where We Are — the Four Connects</a:t>
+            </a:r>
+          </a:p>
+        </p:txBody>
+      </p:sp>
+      <p:pic>
+        <p:nvPicPr>
+          <p:cNvPr id="4" name="Picture 3" descr="four-connects.png"/>
+          <p:cNvPicPr>
+            <a:picLocks noChangeAspect="1"/>
+          </p:cNvPicPr>
+          <p:nvPr/>
+        </p:nvPicPr>
+        <p:blipFill>
+          <a:blip r:embed="rId2"/>
+          <a:stretch>
+            <a:fillRect/>
+          </a:stretch>
+        </p:blipFill>
+        <p:spPr>
+          <a:xfrm>
+            <a:off x="932688" y="1645920"/>
+            <a:ext cx="10332720" cy="3708663"/>
+          </a:xfrm>
+          <a:prstGeom prst="rect">
+            <a:avLst/>
+          </a:prstGeom>
+        </p:spPr>
+      </p:pic>
+      <p:sp>
+        <p:nvSpPr>
+          <p:cNvPr id="5" name="TextBox 4"/>
+          <p:cNvSpPr txBox="1"/>
+          <p:nvPr/>
+        </p:nvSpPr>
+        <p:spPr>
+          <a:xfrm>
+            <a:off x="822960" y="5623560"/>
+            <a:ext cx="10515600" cy="914400"/>
+          </a:xfrm>
+          <a:prstGeom prst="rect">
+            <a:avLst/>
+          </a:prstGeom>
+          <a:noFill/>
+        </p:spPr>
+        <p:txBody>
+          <a:bodyPr wrap="square">
+            <a:spAutoFit/>
+          </a:bodyPr>
+          <a:lstStyle/>
+          <a:p>
+            <a:r>
+              <a:rPr sz="1800" b="0">
+                <a:solidFill>
+                  <a:srgbClr val="222B22"/>
+                </a:solidFill>
+                <a:latin typeface="Calibri"/>
+              </a:rPr>
+              <a:t>Session 14 returns to the second and third boxes — </a:t>
+            </a:r>
+            <a:r>
+              <a:rPr sz="1800" b="1">
+                <a:solidFill>
+                  <a:srgbClr val="2C5F2D"/>
+                </a:solidFill>
+                <a:latin typeface="Calibri"/>
+              </a:rPr>
+              <a:t>Others and God</a:t>
+            </a:r>
+            <a:r>
+              <a:rPr sz="1800" b="0">
+                <a:solidFill>
+                  <a:srgbClr val="222B22"/>
+                </a:solidFill>
+                <a:latin typeface="Calibri"/>
+              </a:rPr>
+              <a:t> — walked again, teen-led. Each connection makes the next one real (Matt. 22:37–40).</a:t>
+            </a:r>
+          </a:p>
+        </p:txBody>
+      </p:sp>
+      <p:sp>
+        <p:nvSpPr>
+          <p:cNvPr id="90" name="SlideNum"/>
+          <p:cNvSpPr txBox="1"/>
+          <p:nvPr/>
+        </p:nvSpPr>
+        <p:spPr>
+          <a:xfrm>
+            <a:off x="11384280" y="6446520"/>
+            <a:ext cx="640080" cy="292608"/>
+          </a:xfrm>
+          <a:prstGeom prst="rect">
+            <a:avLst/>
+          </a:prstGeom>
+          <a:noFill/>
+        </p:spPr>
+        <p:txBody>
+          <a:bodyPr wrap="none" lIns="0" tIns="0" rIns="45720" bIns="0" anchor="ctr"/>
+          <a:lstStyle/>
+          <a:p>
+            <a:pPr algn="r"/>
+            <a:r>
+              <a:t>177a</a:t>
+            </a:r>
+            <a:endParaRPr sz="1000" b="1">
+              <a:solidFill>
+                <a:srgbClr val="7A8A6E"/>
+              </a:solidFill>
+              <a:latin typeface="Calibri"/>
+            </a:endParaRPr>
+          </a:p>
+        </p:txBody>
+      </p:sp>
+    </p:spTree>
+  </p:cSld>
+  <p:clrMapOvr>
+    <a:masterClrMapping/>
+  </p:clrMapOvr>
+</p:sld>
+</file>
+
+<file path=ppt/slides/slide11.xml><?xml version="1.0" encoding="utf-8"?>
+<p:sld xmlns:a="http://schemas.openxmlformats.org/drawingml/2006/main" xmlns:p="http://schemas.openxmlformats.org/presentationml/2006/main" xmlns:r="http://schemas.openxmlformats.org/officeDocument/2006/relationships">
+  <p:cSld>
+    <p:spTree>
+      <p:nvGrpSpPr>
+        <p:cNvPr id="1" name=""/>
+        <p:cNvGrpSpPr/>
+        <p:nvPr/>
+      </p:nvGrpSpPr>
+      <p:grpSpPr/>
+      <p:sp>
+        <p:nvSpPr>
+          <p:cNvPr id="2" name="Rectangle 1"/>
+          <p:cNvSpPr/>
+          <p:nvPr/>
+        </p:nvSpPr>
+        <p:spPr>
+          <a:xfrm>
+            <a:off x="0" y="0"/>
+            <a:ext cx="12192000" cy="6858000"/>
+          </a:xfrm>
+          <a:prstGeom prst="rect">
+            <a:avLst/>
+          </a:prstGeom>
+          <a:solidFill>
+            <a:srgbClr val="FFFFFF"/>
+          </a:solidFill>
+          <a:ln>
+            <a:noFill/>
+          </a:ln>
+          <a:effectLst/>
+        </p:spPr>
+        <p:style>
+          <a:lnRef idx="1">
+            <a:schemeClr val="accent1"/>
+          </a:lnRef>
+          <a:fillRef idx="3">
+            <a:schemeClr val="accent1"/>
+          </a:fillRef>
+          <a:effectRef idx="2">
+            <a:schemeClr val="accent1"/>
+          </a:effectRef>
+          <a:fontRef idx="minor">
+            <a:schemeClr val="lt1"/>
+          </a:fontRef>
+        </p:style>
+        <p:txBody>
+          <a:bodyPr rtlCol="0" anchor="ctr"/>
+          <a:lstStyle/>
+          <a:p>
+            <a:pPr algn="ctr"/>
+          </a:p>
+        </p:txBody>
+      </p:sp>
+      <p:sp>
+        <p:nvSpPr>
+          <p:cNvPr id="3" name="TextBox 2"/>
+          <p:cNvSpPr txBox="1"/>
+          <p:nvPr/>
+        </p:nvSpPr>
+        <p:spPr>
+          <a:xfrm>
+            <a:off x="822960" y="502920"/>
+            <a:ext cx="10515600" cy="822960"/>
+          </a:xfrm>
+          <a:prstGeom prst="rect">
+            <a:avLst/>
+          </a:prstGeom>
+          <a:noFill/>
+        </p:spPr>
+        <p:txBody>
+          <a:bodyPr wrap="square">
+            <a:spAutoFit/>
+          </a:bodyPr>
+          <a:lstStyle/>
+          <a:p>
+            <a:r>
+              <a:rPr sz="2800" b="1">
+                <a:solidFill>
+                  <a:srgbClr val="2C5F2D"/>
+                </a:solidFill>
+                <a:latin typeface="Cambria"/>
+              </a:rPr>
+              <a:t>The Take-Home Sheet — the Daily Rhythm</a:t>
+            </a:r>
+          </a:p>
+        </p:txBody>
+      </p:sp>
+      <p:pic>
+        <p:nvPicPr>
+          <p:cNvPr id="4" name="Picture 3" descr="s14_part1.png"/>
+          <p:cNvPicPr>
+            <a:picLocks noChangeAspect="1"/>
+          </p:cNvPicPr>
+          <p:nvPr/>
+        </p:nvPicPr>
+        <p:blipFill>
+          <a:blip r:embed="rId2"/>
+          <a:stretch>
+            <a:fillRect/>
+          </a:stretch>
+        </p:blipFill>
+        <p:spPr>
+          <a:xfrm>
+            <a:off x="1798167" y="1463040"/>
+            <a:ext cx="8595360" cy="4039819"/>
+          </a:xfrm>
+          <a:prstGeom prst="rect">
+            <a:avLst/>
+          </a:prstGeom>
+          <a:ln w="12700">
+            <a:solidFill>
+              <a:srgbClr val="C8C8C8"/>
+            </a:solidFill>
+          </a:ln>
+        </p:spPr>
+      </p:pic>
+      <p:sp>
+        <p:nvSpPr>
+          <p:cNvPr id="5" name="TextBox 4"/>
+          <p:cNvSpPr txBox="1"/>
+          <p:nvPr/>
+        </p:nvSpPr>
+        <p:spPr>
+          <a:xfrm>
+            <a:off x="822960" y="6355080"/>
+            <a:ext cx="10515600" cy="411480"/>
+          </a:xfrm>
+          <a:prstGeom prst="rect">
+            <a:avLst/>
+          </a:prstGeom>
+          <a:noFill/>
+        </p:spPr>
+        <p:txBody>
+          <a:bodyPr wrap="square">
+            <a:spAutoFit/>
+          </a:bodyPr>
+          <a:lstStyle/>
+          <a:p>
+            <a:r>
+              <a:rPr sz="1400" i="1">
+                <a:solidFill>
+                  <a:srgbClr val="595959"/>
+                </a:solidFill>
+                <a:latin typeface="Calibri"/>
+              </a:rPr>
+              <a:t>Handed out now — this is the sheet in your hands.</a:t>
+            </a:r>
+          </a:p>
+        </p:txBody>
+      </p:sp>
+      <p:sp>
+        <p:nvSpPr>
+          <p:cNvPr id="90" name="SlideNum"/>
+          <p:cNvSpPr txBox="1"/>
+          <p:nvPr/>
+        </p:nvSpPr>
+        <p:spPr>
+          <a:xfrm>
+            <a:off x="11384280" y="6446520"/>
+            <a:ext cx="640080" cy="292608"/>
+          </a:xfrm>
+          <a:prstGeom prst="rect">
+            <a:avLst/>
+          </a:prstGeom>
+          <a:noFill/>
+        </p:spPr>
+        <p:txBody>
+          <a:bodyPr wrap="none" lIns="0" tIns="0" rIns="45720" bIns="0" anchor="ctr"/>
+          <a:lstStyle/>
+          <a:p>
+            <a:pPr algn="r"/>
+            <a:r>
+              <a:t>182</a:t>
+            </a:r>
+            <a:endParaRPr sz="1000" b="1">
+              <a:solidFill>
+                <a:srgbClr val="7A8A6E"/>
+              </a:solidFill>
+              <a:latin typeface="Calibri"/>
+            </a:endParaRPr>
+          </a:p>
+        </p:txBody>
+      </p:sp>
+    </p:spTree>
+  </p:cSld>
+  <p:clrMapOvr>
+    <a:masterClrMapping/>
+  </p:clrMapOvr>
+</p:sld>
+</file>
+
+<file path=ppt/slides/slide12.xml><?xml version="1.0" encoding="utf-8"?>
+<p:sld xmlns:a="http://schemas.openxmlformats.org/drawingml/2006/main" xmlns:p="http://schemas.openxmlformats.org/presentationml/2006/main" xmlns:r="http://schemas.openxmlformats.org/officeDocument/2006/relationships">
+  <p:cSld>
+    <p:spTree>
+      <p:nvGrpSpPr>
+        <p:cNvPr id="1" name=""/>
+        <p:cNvGrpSpPr/>
+        <p:nvPr/>
+      </p:nvGrpSpPr>
+      <p:grpSpPr/>
+      <p:sp>
+        <p:nvSpPr>
+          <p:cNvPr id="2" name="Rectangle 1"/>
+          <p:cNvSpPr/>
+          <p:nvPr/>
+        </p:nvSpPr>
+        <p:spPr>
+          <a:xfrm>
+            <a:off x="0" y="0"/>
+            <a:ext cx="12192000" cy="6858000"/>
+          </a:xfrm>
+          <a:prstGeom prst="rect">
+            <a:avLst/>
+          </a:prstGeom>
+          <a:solidFill>
+            <a:srgbClr val="FFFFFF"/>
+          </a:solidFill>
+          <a:ln>
+            <a:noFill/>
+          </a:ln>
+          <a:effectLst/>
+        </p:spPr>
+        <p:style>
+          <a:lnRef idx="1">
+            <a:schemeClr val="accent1"/>
+          </a:lnRef>
+          <a:fillRef idx="3">
+            <a:schemeClr val="accent1"/>
+          </a:fillRef>
+          <a:effectRef idx="2">
+            <a:schemeClr val="accent1"/>
+          </a:effectRef>
+          <a:fontRef idx="minor">
+            <a:schemeClr val="lt1"/>
+          </a:fontRef>
+        </p:style>
+        <p:txBody>
+          <a:bodyPr rtlCol="0" anchor="ctr"/>
+          <a:lstStyle/>
+          <a:p>
+            <a:pPr algn="ctr"/>
+          </a:p>
+        </p:txBody>
+      </p:sp>
+      <p:sp>
+        <p:nvSpPr>
+          <p:cNvPr id="3" name="TextBox 2"/>
+          <p:cNvSpPr txBox="1"/>
+          <p:nvPr/>
+        </p:nvSpPr>
+        <p:spPr>
+          <a:xfrm>
+            <a:off x="822960" y="502920"/>
+            <a:ext cx="10515600" cy="822960"/>
+          </a:xfrm>
+          <a:prstGeom prst="rect">
+            <a:avLst/>
+          </a:prstGeom>
+          <a:noFill/>
+        </p:spPr>
+        <p:txBody>
+          <a:bodyPr wrap="square">
+            <a:spAutoFit/>
+          </a:bodyPr>
+          <a:lstStyle/>
+          <a:p>
+            <a:r>
+              <a:rPr sz="2800" b="1">
+                <a:solidFill>
+                  <a:srgbClr val="2C5F2D"/>
+                </a:solidFill>
+                <a:latin typeface="Cambria"/>
+              </a:rPr>
+              <a:t>The Take-Home Sheet — the Four Parts</a:t>
+            </a:r>
+          </a:p>
+        </p:txBody>
+      </p:sp>
+      <p:pic>
+        <p:nvPicPr>
+          <p:cNvPr id="4" name="Picture 3" descr="s14_part2.png"/>
+          <p:cNvPicPr>
+            <a:picLocks noChangeAspect="1"/>
+          </p:cNvPicPr>
+          <p:nvPr/>
+        </p:nvPicPr>
+        <p:blipFill>
+          <a:blip r:embed="rId2"/>
+          <a:stretch>
+            <a:fillRect/>
+          </a:stretch>
+        </p:blipFill>
+        <p:spPr>
+          <a:xfrm>
+            <a:off x="2433167" y="1463040"/>
+            <a:ext cx="7325360" cy="4709160"/>
+          </a:xfrm>
+          <a:prstGeom prst="rect">
+            <a:avLst/>
+          </a:prstGeom>
+          <a:ln w="12700">
+            <a:solidFill>
+              <a:srgbClr val="C8C8C8"/>
+            </a:solidFill>
+          </a:ln>
+        </p:spPr>
+      </p:pic>
+      <p:sp>
+        <p:nvSpPr>
+          <p:cNvPr id="5" name="TextBox 4"/>
+          <p:cNvSpPr txBox="1"/>
+          <p:nvPr/>
+        </p:nvSpPr>
+        <p:spPr>
+          <a:xfrm>
+            <a:off x="822960" y="6355080"/>
+            <a:ext cx="10515600" cy="411480"/>
+          </a:xfrm>
+          <a:prstGeom prst="rect">
+            <a:avLst/>
+          </a:prstGeom>
+          <a:noFill/>
+        </p:spPr>
+        <p:txBody>
+          <a:bodyPr wrap="square">
+            <a:spAutoFit/>
+          </a:bodyPr>
+          <a:lstStyle/>
+          <a:p>
+            <a:r>
+              <a:rPr sz="1400" i="1">
+                <a:solidFill>
+                  <a:srgbClr val="595959"/>
+                </a:solidFill>
+                <a:latin typeface="Calibri"/>
+              </a:rPr>
+              <a:t>One practice at a time — and a partner expecting you at the end of week one.</a:t>
+            </a:r>
+          </a:p>
+        </p:txBody>
+      </p:sp>
+      <p:sp>
+        <p:nvSpPr>
+          <p:cNvPr id="90" name="SlideNum"/>
+          <p:cNvSpPr txBox="1"/>
+          <p:nvPr/>
+        </p:nvSpPr>
+        <p:spPr>
+          <a:xfrm>
+            <a:off x="11384280" y="6446520"/>
+            <a:ext cx="640080" cy="292608"/>
+          </a:xfrm>
+          <a:prstGeom prst="rect">
+            <a:avLst/>
+          </a:prstGeom>
+          <a:noFill/>
+        </p:spPr>
+        <p:txBody>
+          <a:bodyPr wrap="none" lIns="0" tIns="0" rIns="45720" bIns="0" anchor="ctr"/>
+          <a:lstStyle/>
+          <a:p>
+            <a:pPr algn="r"/>
+            <a:r>
+              <a:t>182a</a:t>
+            </a:r>
+            <a:endParaRPr sz="1000" b="1">
+              <a:solidFill>
+                <a:srgbClr val="7A8A6E"/>
+              </a:solidFill>
+              <a:latin typeface="Calibri"/>
+            </a:endParaRPr>
+          </a:p>
+        </p:txBody>
+      </p:sp>
+    </p:spTree>
+  </p:cSld>
+  <p:clrMapOvr>
+    <a:masterClrMapping/>
+  </p:clrMapOvr>
+</p:sld>
+</file>
+
+<file path=ppt/slides/slide2.xml><?xml version="1.0" encoding="utf-8"?>
 <p:sld xmlns:a="http://schemas.openxmlformats.org/drawingml/2006/main" xmlns:r="http://schemas.openxmlformats.org/officeDocument/2006/relationships" xmlns:p="http://schemas.openxmlformats.org/presentationml/2006/main">
   <p:cSld>
     <p:spTree>
@@ -4672,7 +5414,7 @@
 </p:sld>
 </file>
 
-<file path=ppt/slides/slide178.xml><?xml version="1.0" encoding="utf-8"?>
+<file path=ppt/slides/slide3.xml><?xml version="1.0" encoding="utf-8"?>
 <p:sld xmlns:a="http://schemas.openxmlformats.org/drawingml/2006/main" xmlns:r="http://schemas.openxmlformats.org/officeDocument/2006/relationships" xmlns:p="http://schemas.openxmlformats.org/presentationml/2006/main">
   <p:cSld>
     <p:spTree>
@@ -5023,7 +5765,7 @@
 </p:sld>
 </file>
 
-<file path=ppt/slides/slide179.xml><?xml version="1.0" encoding="utf-8"?>
+<file path=ppt/slides/slide4.xml><?xml version="1.0" encoding="utf-8"?>
 <p:sld xmlns:a="http://schemas.openxmlformats.org/drawingml/2006/main" xmlns:r="http://schemas.openxmlformats.org/officeDocument/2006/relationships" xmlns:p="http://schemas.openxmlformats.org/presentationml/2006/main">
   <p:cSld>
     <p:spTree>
@@ -5370,7 +6112,7 @@
 </p:sld>
 </file>
 
-<file path=ppt/slides/slide180.xml><?xml version="1.0" encoding="utf-8"?>
+<file path=ppt/slides/slide5.xml><?xml version="1.0" encoding="utf-8"?>
 <p:sld xmlns:a="http://schemas.openxmlformats.org/drawingml/2006/main" xmlns:r="http://schemas.openxmlformats.org/officeDocument/2006/relationships" xmlns:p="http://schemas.openxmlformats.org/presentationml/2006/main">
   <p:cSld>
     <p:spTree>
@@ -5617,7 +6359,7 @@
 </p:sld>
 </file>
 
-<file path=ppt/slides/slide181.xml><?xml version="1.0" encoding="utf-8"?>
+<file path=ppt/slides/slide6.xml><?xml version="1.0" encoding="utf-8"?>
 <p:sld xmlns:a="http://schemas.openxmlformats.org/drawingml/2006/main" xmlns:r="http://schemas.openxmlformats.org/officeDocument/2006/relationships" xmlns:p="http://schemas.openxmlformats.org/presentationml/2006/main">
   <p:cSld>
     <p:spTree>
@@ -5944,7 +6686,7 @@
 </p:sld>
 </file>
 
-<file path=ppt/slides/slide182.xml><?xml version="1.0" encoding="utf-8"?>
+<file path=ppt/slides/slide8.xml><?xml version="1.0" encoding="utf-8"?>
 <p:sld xmlns:a="http://schemas.openxmlformats.org/drawingml/2006/main" xmlns:r="http://schemas.openxmlformats.org/officeDocument/2006/relationships" xmlns:p="http://schemas.openxmlformats.org/presentationml/2006/main">
   <p:cSld>
     <p:spTree>
@@ -6024,201 +6766,6 @@
                 </a:solidFill>
                 <a:latin typeface="Cambria"/>
               </a:rPr>
-              <a:t>Your Take-Home Card — This Session’s Practice</a:t>
-            </a:r>
-          </a:p>
-        </p:txBody>
-      </p:sp>
-      <p:sp>
-        <p:nvSpPr>
-          <p:cNvPr id="90" name="SlideNum"/>
-          <p:cNvSpPr txBox="1"/>
-          <p:nvPr/>
-        </p:nvSpPr>
-        <p:spPr>
-          <a:xfrm>
-            <a:off x="11384280" y="6446520"/>
-            <a:ext cx="640080" cy="292608"/>
-          </a:xfrm>
-          <a:prstGeom prst="rect">
-            <a:avLst/>
-          </a:prstGeom>
-          <a:noFill/>
-        </p:spPr>
-        <p:txBody>
-          <a:bodyPr wrap="none" lIns="0" tIns="0" rIns="45720" bIns="0" anchor="ctr"/>
-          <a:lstStyle/>
-          <a:p>
-            <a:pPr algn="r"/>
-            <a:r>
-              <a:t>182</a:t>
-            </a:r>
-            <a:endParaRPr sz="1000" b="1">
-              <a:solidFill>
-                <a:srgbClr val="7A8A6E"/>
-              </a:solidFill>
-              <a:latin typeface="Calibri"/>
-            </a:endParaRPr>
-          </a:p>
-        </p:txBody>
-      </p:sp>
-      <p:pic>
-        <p:nvPicPr>
-          <p:cNvPr id="270" name="CardImage" descr="the Week 14 check-off card, as handed out"/>
-          <p:cNvPicPr>
-            <a:picLocks noChangeAspect="1"/>
-          </p:cNvPicPr>
-          <p:nvPr/>
-        </p:nvPicPr>
-        <p:blipFill>
-          <a:blip r:embed="rId3"/>
-          <a:stretch>
-            <a:fillRect/>
-          </a:stretch>
-        </p:blipFill>
-        <p:spPr>
-          <a:xfrm>
-            <a:off x="1621175" y="1554480"/>
-            <a:ext cx="8949344" cy="4480560"/>
-          </a:xfrm>
-          <a:prstGeom prst="rect">
-            <a:avLst/>
-          </a:prstGeom>
-          <a:ln w="76200">
-            <a:solidFill>
-              <a:srgbClr val="FFFFFF"/>
-            </a:solidFill>
-          </a:ln>
-          <a:effectLst>
-            <a:outerShdw blurRad="63500" dist="25400" dir="5400000" rotWithShape="0">
-              <a:srgbClr val="000000">
-                <a:alpha val="35000"/>
-              </a:srgbClr>
-            </a:outerShdw>
-          </a:effectLst>
-        </p:spPr>
-      </p:pic>
-      <p:sp>
-        <p:nvSpPr>
-          <p:cNvPr id="271" name="Caption"/>
-          <p:cNvSpPr txBox="1"/>
-          <p:nvPr/>
-        </p:nvSpPr>
-        <p:spPr>
-          <a:xfrm>
-            <a:off x="822960" y="6217920"/>
-            <a:ext cx="10515600" cy="457200"/>
-          </a:xfrm>
-          <a:prstGeom prst="rect">
-            <a:avLst/>
-          </a:prstGeom>
-          <a:noFill/>
-        </p:spPr>
-        <p:txBody>
-          <a:bodyPr wrap="square"/>
-          <a:lstStyle/>
-          <a:p>
-            <a:pPr algn="ctr"/>
-            <a:r>
-              <a:rPr sz="1800" b="0" i="1">
-                <a:solidFill>
-                  <a:srgbClr val="222B22"/>
-                </a:solidFill>
-                <a:latin typeface="Calibri"/>
-              </a:rPr>
-              <a:t>Handed out now — fridge, mirror, journal pocket.</a:t>
-            </a:r>
-          </a:p>
-        </p:txBody>
-      </p:sp>
-    </p:spTree>
-  </p:cSld>
-  <p:clrMapOvr>
-    <a:masterClrMapping/>
-  </p:clrMapOvr>
-</p:sld>
-</file>
-
-<file path=ppt/slides/slide183.xml><?xml version="1.0" encoding="utf-8"?>
-<p:sld xmlns:a="http://schemas.openxmlformats.org/drawingml/2006/main" xmlns:r="http://schemas.openxmlformats.org/officeDocument/2006/relationships" xmlns:p="http://schemas.openxmlformats.org/presentationml/2006/main">
-  <p:cSld>
-    <p:spTree>
-      <p:nvGrpSpPr>
-        <p:cNvPr id="1" name=""/>
-        <p:cNvGrpSpPr/>
-        <p:nvPr/>
-      </p:nvGrpSpPr>
-      <p:grpSpPr>
-        <a:xfrm>
-          <a:off x="0" y="0"/>
-          <a:ext cx="0" cy="0"/>
-          <a:chOff x="0" y="0"/>
-          <a:chExt cx="0" cy="0"/>
-        </a:xfrm>
-      </p:grpSpPr>
-      <p:sp>
-        <p:nvSpPr>
-          <p:cNvPr id="2" name="Rectangle 1"/>
-          <p:cNvSpPr/>
-          <p:nvPr/>
-        </p:nvSpPr>
-        <p:spPr>
-          <a:xfrm>
-            <a:off x="0" y="0"/>
-            <a:ext cx="12191695" cy="6858000"/>
-          </a:xfrm>
-          <a:prstGeom prst="rect">
-            <a:avLst/>
-          </a:prstGeom>
-          <a:solidFill>
-            <a:srgbClr val="FFFFFF"/>
-          </a:solidFill>
-          <a:ln>
-            <a:noFill/>
-          </a:ln>
-        </p:spPr>
-        <p:txBody>
-          <a:bodyPr/>
-          <a:lstStyle/>
-          <a:p>
-            <a:endParaRPr/>
-          </a:p>
-        </p:txBody>
-      </p:sp>
-      <p:sp>
-        <p:nvSpPr>
-          <p:cNvPr id="3" name="TextBox 2"/>
-          <p:cNvSpPr txBox="1"/>
-          <p:nvPr/>
-        </p:nvSpPr>
-        <p:spPr>
-          <a:xfrm>
-            <a:off x="822960" y="502920"/>
-            <a:ext cx="10515600" cy="822960"/>
-          </a:xfrm>
-          <a:prstGeom prst="rect">
-            <a:avLst/>
-          </a:prstGeom>
-          <a:noFill/>
-        </p:spPr>
-        <p:txBody>
-          <a:bodyPr wrap="square">
-            <a:spAutoFit/>
-          </a:bodyPr>
-          <a:lstStyle/>
-          <a:p>
-            <a:pPr algn="l">
-              <a:spcAft>
-                <a:spcPts val="600"/>
-              </a:spcAft>
-            </a:pPr>
-            <a:r>
-              <a:rPr sz="2800" b="1" i="0">
-                <a:solidFill>
-                  <a:srgbClr val="2C5F2D"/>
-                </a:solidFill>
-                <a:latin typeface="Cambria"/>
-              </a:rPr>
               <a:t>Closing the Container + Aaronic Blessing</a:t>
             </a:r>
           </a:p>
@@ -6548,7 +7095,7 @@
 </p:sld>
 </file>
 
-<file path=ppt/slides/slide184.xml><?xml version="1.0" encoding="utf-8"?>
+<file path=ppt/slides/slide9.xml><?xml version="1.0" encoding="utf-8"?>
 <p:sld xmlns:a="http://schemas.openxmlformats.org/drawingml/2006/main" xmlns:r="http://schemas.openxmlformats.org/officeDocument/2006/relationships" xmlns:p="http://schemas.openxmlformats.org/presentationml/2006/main">
   <p:cSld>
     <p:spTree>

--- a/_implementation-notes/evening-series/FotH Evening Session 14 Slides DRAFT v1.pptx
+++ b/_implementation-notes/evening-series/FotH Evening Session 14 Slides DRAFT v1.pptx
@@ -4577,7 +4577,7 @@
 </file>
 
 <file path=ppt/slides/slide10.xml><?xml version="1.0" encoding="utf-8"?>
-<p:sld xmlns:a="http://schemas.openxmlformats.org/drawingml/2006/main" xmlns:p="http://schemas.openxmlformats.org/presentationml/2006/main" xmlns:r="http://schemas.openxmlformats.org/officeDocument/2006/relationships">
+<p:sld xmlns:a="http://schemas.openxmlformats.org/drawingml/2006/main" xmlns:r="http://schemas.openxmlformats.org/officeDocument/2006/relationships" xmlns:p="http://schemas.openxmlformats.org/presentationml/2006/main">
   <p:cSld>
     <p:spTree>
       <p:nvGrpSpPr>
@@ -4585,7 +4585,14 @@
         <p:cNvGrpSpPr/>
         <p:nvPr/>
       </p:nvGrpSpPr>
-      <p:grpSpPr/>
+      <p:grpSpPr>
+        <a:xfrm>
+          <a:off x="0" y="0"/>
+          <a:ext cx="0" cy="0"/>
+          <a:chOff x="0" y="0"/>
+          <a:chExt cx="0" cy="0"/>
+        </a:xfrm>
+      </p:grpSpPr>
       <p:sp>
         <p:nvSpPr>
           <p:cNvPr id="2" name="Rectangle 1"/>
@@ -4595,7 +4602,7 @@
         <p:spPr>
           <a:xfrm>
             <a:off x="0" y="0"/>
-            <a:ext cx="12192000" cy="6858000"/>
+            <a:ext cx="12191695" cy="6858000"/>
           </a:xfrm>
           <a:prstGeom prst="rect">
             <a:avLst/>
@@ -4606,27 +4613,12 @@
           <a:ln>
             <a:noFill/>
           </a:ln>
-          <a:effectLst/>
         </p:spPr>
-        <p:style>
-          <a:lnRef idx="1">
-            <a:schemeClr val="accent1"/>
-          </a:lnRef>
-          <a:fillRef idx="3">
-            <a:schemeClr val="accent1"/>
-          </a:fillRef>
-          <a:effectRef idx="2">
-            <a:schemeClr val="accent1"/>
-          </a:effectRef>
-          <a:fontRef idx="minor">
-            <a:schemeClr val="lt1"/>
-          </a:fontRef>
-        </p:style>
-        <p:txBody>
-          <a:bodyPr rtlCol="0" anchor="ctr"/>
-          <a:lstStyle/>
-          <a:p>
-            <a:pPr algn="ctr"/>
+        <p:txBody>
+          <a:bodyPr/>
+          <a:lstStyle/>
+          <a:p>
+            <a:endParaRPr/>
           </a:p>
         </p:txBody>
       </p:sp>
@@ -4652,52 +4644,33 @@
           </a:bodyPr>
           <a:lstStyle/>
           <a:p>
-            <a:r>
-              <a:rPr sz="2800" b="1">
+            <a:pPr algn="l">
+              <a:spcAft>
+                <a:spcPts val="600"/>
+              </a:spcAft>
+            </a:pPr>
+            <a:r>
+              <a:rPr sz="2800" b="1" i="0">
                 <a:solidFill>
                   <a:srgbClr val="2C5F2D"/>
                 </a:solidFill>
                 <a:latin typeface="Cambria"/>
               </a:rPr>
-              <a:t>Where We Are — the Four Connects</a:t>
-            </a:r>
-          </a:p>
-        </p:txBody>
-      </p:sp>
-      <p:pic>
-        <p:nvPicPr>
-          <p:cNvPr id="4" name="Picture 3" descr="four-connects.png"/>
-          <p:cNvPicPr>
-            <a:picLocks noChangeAspect="1"/>
-          </p:cNvPicPr>
+              <a:t>Closing the Container + Aaronic Blessing</a:t>
+            </a:r>
+          </a:p>
+        </p:txBody>
+      </p:sp>
+      <p:sp>
+        <p:nvSpPr>
+          <p:cNvPr id="4" name="TextBox 4"/>
+          <p:cNvSpPr txBox="1"/>
           <p:nvPr/>
-        </p:nvPicPr>
-        <p:blipFill>
-          <a:blip r:embed="rId2"/>
-          <a:stretch>
-            <a:fillRect/>
-          </a:stretch>
-        </p:blipFill>
+        </p:nvSpPr>
         <p:spPr>
           <a:xfrm>
-            <a:off x="932688" y="1645920"/>
-            <a:ext cx="10332720" cy="3708663"/>
-          </a:xfrm>
-          <a:prstGeom prst="rect">
-            <a:avLst/>
-          </a:prstGeom>
-        </p:spPr>
-      </p:pic>
-      <p:sp>
-        <p:nvSpPr>
-          <p:cNvPr id="5" name="TextBox 4"/>
-          <p:cNvSpPr txBox="1"/>
-          <p:nvPr/>
-        </p:nvSpPr>
-        <p:spPr>
-          <a:xfrm>
-            <a:off x="822960" y="5623560"/>
-            <a:ext cx="10515600" cy="914400"/>
+            <a:off x="822960" y="1600200"/>
+            <a:ext cx="5669280" cy="4572000"/>
           </a:xfrm>
           <a:prstGeom prst="rect">
             <a:avLst/>
@@ -4705,37 +4678,268 @@
           <a:noFill/>
         </p:spPr>
         <p:txBody>
-          <a:bodyPr wrap="square">
-            <a:spAutoFit/>
-          </a:bodyPr>
-          <a:lstStyle/>
-          <a:p>
-            <a:r>
-              <a:rPr sz="1800" b="0">
+          <a:bodyPr wrap="square" lIns="91440" tIns="91440" rIns="91440" bIns="91440"/>
+          <a:lstStyle/>
+          <a:p>
+            <a:pPr marL="274320" indent="-274320">
+              <a:spcAft>
+                <a:spcPts val="900"/>
+              </a:spcAft>
+            </a:pPr>
+            <a:r>
+              <a:rPr sz="2200" b="1" i="0">
+                <a:solidFill>
+                  <a:srgbClr val="97BC62"/>
+                </a:solidFill>
+                <a:latin typeface="Calibri"/>
+              </a:rPr>
+              <a:t>•  </a:t>
+            </a:r>
+            <a:r>
+              <a:rPr sz="2200" b="0" i="0">
                 <a:solidFill>
                   <a:srgbClr val="222B22"/>
                 </a:solidFill>
                 <a:latin typeface="Calibri"/>
               </a:rPr>
-              <a:t>Session 14 returns to the second and third boxes — </a:t>
-            </a:r>
-            <a:r>
-              <a:rPr sz="1800" b="1">
-                <a:solidFill>
-                  <a:srgbClr val="2C5F2D"/>
-                </a:solidFill>
-                <a:latin typeface="Calibri"/>
-              </a:rPr>
-              <a:t>Others and God</a:t>
-            </a:r>
-            <a:r>
-              <a:rPr sz="1800" b="0">
+              <a:t>We close the way we opened — the container, six steps:</a:t>
+            </a:r>
+          </a:p>
+          <a:p>
+            <a:pPr marL="685800" indent="-274320">
+              <a:spcAft>
+                <a:spcPts val="700"/>
+              </a:spcAft>
+            </a:pPr>
+            <a:r>
+              <a:rPr sz="2000" b="1" i="0">
+                <a:solidFill>
+                  <a:srgbClr val="97BC62"/>
+                </a:solidFill>
+                <a:latin typeface="Calibri"/>
+              </a:rPr>
+              <a:t>1   </a:t>
+            </a:r>
+            <a:r>
+              <a:rPr sz="2000" b="0" i="0">
                 <a:solidFill>
                   <a:srgbClr val="222B22"/>
                 </a:solidFill>
                 <a:latin typeface="Calibri"/>
               </a:rPr>
-              <a:t> — walked again, teen-led. Each connection makes the next one real (Matt. 22:37–40).</a:t>
+              <a:t>Stand again — same circle, same posture as the open</a:t>
+            </a:r>
+          </a:p>
+          <a:p>
+            <a:pPr marL="685800" indent="-274320">
+              <a:spcAft>
+                <a:spcPts val="700"/>
+              </a:spcAft>
+            </a:pPr>
+            <a:r>
+              <a:rPr sz="2000" b="1" i="0">
+                <a:solidFill>
+                  <a:srgbClr val="97BC62"/>
+                </a:solidFill>
+                <a:latin typeface="Calibri"/>
+              </a:rPr>
+              <a:t>2   </a:t>
+            </a:r>
+            <a:r>
+              <a:rPr sz="2000" b="0" i="0">
+                <a:solidFill>
+                  <a:srgbClr val="222B22"/>
+                </a:solidFill>
+                <a:latin typeface="Calibri"/>
+              </a:rPr>
+              <a:t>One-word landing — compare it to your opening word</a:t>
+            </a:r>
+          </a:p>
+          <a:p>
+            <a:pPr marL="685800" indent="-274320">
+              <a:spcAft>
+                <a:spcPts val="700"/>
+              </a:spcAft>
+            </a:pPr>
+            <a:r>
+              <a:rPr sz="2000" b="1" i="0">
+                <a:solidFill>
+                  <a:srgbClr val="97BC62"/>
+                </a:solidFill>
+                <a:latin typeface="Calibri"/>
+              </a:rPr>
+              <a:t>3   </a:t>
+            </a:r>
+            <a:r>
+              <a:rPr sz="2000" b="0" i="0">
+                <a:solidFill>
+                  <a:srgbClr val="222B22"/>
+                </a:solidFill>
+                <a:latin typeface="Calibri"/>
+              </a:rPr>
+              <a:t>The one thing you are taking from tonight</a:t>
+            </a:r>
+          </a:p>
+          <a:p>
+            <a:pPr marL="685800" indent="-274320">
+              <a:spcAft>
+                <a:spcPts val="700"/>
+              </a:spcAft>
+            </a:pPr>
+            <a:r>
+              <a:rPr sz="2000" b="1" i="0">
+                <a:solidFill>
+                  <a:srgbClr val="97BC62"/>
+                </a:solidFill>
+                <a:latin typeface="Calibri"/>
+              </a:rPr>
+              <a:t>4   </a:t>
+            </a:r>
+            <a:r>
+              <a:rPr sz="2000" b="0" i="0">
+                <a:solidFill>
+                  <a:srgbClr val="222B22"/>
+                </a:solidFill>
+                <a:latin typeface="Calibri"/>
+              </a:rPr>
+              <a:t>The one practice — committed aloud, or modified to one you will actually keep</a:t>
+            </a:r>
+          </a:p>
+          <a:p>
+            <a:pPr marL="685800" indent="-274320">
+              <a:spcAft>
+                <a:spcPts val="700"/>
+              </a:spcAft>
+            </a:pPr>
+            <a:r>
+              <a:rPr sz="2000" b="1" i="0">
+                <a:solidFill>
+                  <a:srgbClr val="97BC62"/>
+                </a:solidFill>
+                <a:latin typeface="Calibri"/>
+              </a:rPr>
+              <a:t>5   </a:t>
+            </a:r>
+            <a:r>
+              <a:rPr sz="2000" b="0" i="0">
+                <a:solidFill>
+                  <a:srgbClr val="222B22"/>
+                </a:solidFill>
+                <a:latin typeface="Calibri"/>
+              </a:rPr>
+              <a:t>Blessings — specific, witnessed, short</a:t>
+            </a:r>
+          </a:p>
+          <a:p>
+            <a:pPr marL="685800" indent="-274320">
+              <a:spcAft>
+                <a:spcPts val="700"/>
+              </a:spcAft>
+            </a:pPr>
+            <a:r>
+              <a:rPr sz="2000" b="1" i="0">
+                <a:solidFill>
+                  <a:srgbClr val="97BC62"/>
+                </a:solidFill>
+                <a:latin typeface="Calibri"/>
+              </a:rPr>
+              <a:t>6   </a:t>
+            </a:r>
+            <a:r>
+              <a:rPr sz="2000" b="0" i="0">
+                <a:solidFill>
+                  <a:srgbClr val="222B22"/>
+                </a:solidFill>
+                <a:latin typeface="Calibri"/>
+              </a:rPr>
+              <a:t>Closing prayer — and the Aaronic blessing, spoken over each other, face to face</a:t>
+            </a:r>
+          </a:p>
+        </p:txBody>
+      </p:sp>
+      <p:sp>
+        <p:nvSpPr>
+          <p:cNvPr id="6" name="TextBox 6"/>
+          <p:cNvSpPr txBox="1"/>
+          <p:nvPr/>
+        </p:nvSpPr>
+        <p:spPr>
+          <a:xfrm>
+            <a:off x="6766560" y="1737360"/>
+            <a:ext cx="4663440" cy="2926080"/>
+          </a:xfrm>
+          <a:prstGeom prst="rect">
+            <a:avLst/>
+          </a:prstGeom>
+          <a:solidFill>
+            <a:srgbClr val="F1F6EC"/>
+          </a:solidFill>
+        </p:spPr>
+        <p:txBody>
+          <a:bodyPr wrap="square" lIns="91440" tIns="91440" rIns="91440" bIns="91440" anchor="ctr"/>
+          <a:lstStyle/>
+          <a:p>
+            <a:pPr>
+              <a:spcAft>
+                <a:spcPts val="900"/>
+              </a:spcAft>
+            </a:pPr>
+            <a:r>
+              <a:rPr sz="1200" b="1" i="0">
+                <a:solidFill>
+                  <a:srgbClr val="97BC62"/>
+                </a:solidFill>
+                <a:latin typeface="Calibri"/>
+              </a:rPr>
+              <a:t>THE AARONIC BLESSING — NUMBERS 6:24–26</a:t>
+            </a:r>
+          </a:p>
+          <a:p>
+            <a:pPr>
+              <a:spcAft>
+                <a:spcPts val="600"/>
+              </a:spcAft>
+            </a:pPr>
+            <a:r>
+              <a:rPr sz="2400" b="0" i="1">
+                <a:solidFill>
+                  <a:srgbClr val="222B22"/>
+                </a:solidFill>
+                <a:latin typeface="Cambria"/>
+              </a:rPr>
+              <a:t>“The Lord bless you and keep you;</a:t>
+            </a:r>
+          </a:p>
+          <a:p>
+            <a:pPr>
+              <a:spcAft>
+                <a:spcPts val="600"/>
+              </a:spcAft>
+            </a:pPr>
+            <a:r>
+              <a:rPr sz="2400" b="0" i="1">
+                <a:solidFill>
+                  <a:srgbClr val="222B22"/>
+                </a:solidFill>
+                <a:latin typeface="Cambria"/>
+              </a:rPr>
+              <a:t>the Lord make his face to shine upon you, and be gracious to you;</a:t>
+            </a:r>
+          </a:p>
+          <a:p>
+            <a:pPr>
+              <a:spcAft>
+                <a:spcPts val="600"/>
+              </a:spcAft>
+            </a:pPr>
+            <a:r>
+              <a:rPr sz="2400" b="0" i="1">
+                <a:solidFill>
+                  <a:srgbClr val="222B22"/>
+                </a:solidFill>
+                <a:latin typeface="Cambria"/>
+              </a:rPr>
+              <a:t>the Lord lift up his countenance upon you, and give you peace.”</a:t>
             </a:r>
           </a:p>
         </p:txBody>
@@ -4762,7 +4966,7 @@
           <a:p>
             <a:pPr algn="r"/>
             <a:r>
-              <a:t>177a</a:t>
+              <a:t>183</a:t>
             </a:r>
             <a:endParaRPr sz="1000" b="1">
               <a:solidFill>
@@ -4782,7 +4986,7 @@
 </file>
 
 <file path=ppt/slides/slide11.xml><?xml version="1.0" encoding="utf-8"?>
-<p:sld xmlns:a="http://schemas.openxmlformats.org/drawingml/2006/main" xmlns:p="http://schemas.openxmlformats.org/presentationml/2006/main" xmlns:r="http://schemas.openxmlformats.org/officeDocument/2006/relationships">
+<p:sld xmlns:a="http://schemas.openxmlformats.org/drawingml/2006/main" xmlns:r="http://schemas.openxmlformats.org/officeDocument/2006/relationships" xmlns:p="http://schemas.openxmlformats.org/presentationml/2006/main">
   <p:cSld>
     <p:spTree>
       <p:nvGrpSpPr>
@@ -4790,7 +4994,14 @@
         <p:cNvGrpSpPr/>
         <p:nvPr/>
       </p:nvGrpSpPr>
-      <p:grpSpPr/>
+      <p:grpSpPr>
+        <a:xfrm>
+          <a:off x="0" y="0"/>
+          <a:ext cx="0" cy="0"/>
+          <a:chOff x="0" y="0"/>
+          <a:chExt cx="0" cy="0"/>
+        </a:xfrm>
+      </p:grpSpPr>
       <p:sp>
         <p:nvSpPr>
           <p:cNvPr id="2" name="Rectangle 1"/>
@@ -4800,7 +5011,7 @@
         <p:spPr>
           <a:xfrm>
             <a:off x="0" y="0"/>
-            <a:ext cx="12192000" cy="6858000"/>
+            <a:ext cx="12191695" cy="6858000"/>
           </a:xfrm>
           <a:prstGeom prst="rect">
             <a:avLst/>
@@ -4811,27 +5022,12 @@
           <a:ln>
             <a:noFill/>
           </a:ln>
-          <a:effectLst/>
         </p:spPr>
-        <p:style>
-          <a:lnRef idx="1">
-            <a:schemeClr val="accent1"/>
-          </a:lnRef>
-          <a:fillRef idx="3">
-            <a:schemeClr val="accent1"/>
-          </a:fillRef>
-          <a:effectRef idx="2">
-            <a:schemeClr val="accent1"/>
-          </a:effectRef>
-          <a:fontRef idx="minor">
-            <a:schemeClr val="lt1"/>
-          </a:fontRef>
-        </p:style>
-        <p:txBody>
-          <a:bodyPr rtlCol="0" anchor="ctr"/>
-          <a:lstStyle/>
-          <a:p>
-            <a:pPr algn="ctr"/>
+        <p:txBody>
+          <a:bodyPr/>
+          <a:lstStyle/>
+          <a:p>
+            <a:endParaRPr/>
           </a:p>
         </p:txBody>
       </p:sp>
@@ -4857,57 +5053,33 @@
           </a:bodyPr>
           <a:lstStyle/>
           <a:p>
-            <a:r>
-              <a:rPr sz="2800" b="1">
+            <a:pPr algn="l">
+              <a:spcAft>
+                <a:spcPts val="600"/>
+              </a:spcAft>
+            </a:pPr>
+            <a:r>
+              <a:rPr sz="2800" b="1" i="0">
                 <a:solidFill>
                   <a:srgbClr val="2C5F2D"/>
                 </a:solidFill>
                 <a:latin typeface="Cambria"/>
               </a:rPr>
-              <a:t>The Take-Home Sheet — the Daily Rhythm</a:t>
-            </a:r>
-          </a:p>
-        </p:txBody>
-      </p:sp>
-      <p:pic>
-        <p:nvPicPr>
-          <p:cNvPr id="4" name="Picture 3" descr="s14_part1.png"/>
-          <p:cNvPicPr>
-            <a:picLocks noChangeAspect="1"/>
-          </p:cNvPicPr>
+              <a:t>The Leader Feedback Round</a:t>
+            </a:r>
+          </a:p>
+        </p:txBody>
+      </p:sp>
+      <p:sp>
+        <p:nvSpPr>
+          <p:cNvPr id="4" name="TextBox 4"/>
+          <p:cNvSpPr txBox="1"/>
           <p:nvPr/>
-        </p:nvPicPr>
-        <p:blipFill>
-          <a:blip r:embed="rId2"/>
-          <a:stretch>
-            <a:fillRect/>
-          </a:stretch>
-        </p:blipFill>
+        </p:nvSpPr>
         <p:spPr>
           <a:xfrm>
-            <a:off x="1798167" y="1463040"/>
-            <a:ext cx="8595360" cy="4039819"/>
-          </a:xfrm>
-          <a:prstGeom prst="rect">
-            <a:avLst/>
-          </a:prstGeom>
-          <a:ln w="12700">
-            <a:solidFill>
-              <a:srgbClr val="C8C8C8"/>
-            </a:solidFill>
-          </a:ln>
-        </p:spPr>
-      </p:pic>
-      <p:sp>
-        <p:nvSpPr>
-          <p:cNvPr id="5" name="TextBox 4"/>
-          <p:cNvSpPr txBox="1"/>
-          <p:nvPr/>
-        </p:nvSpPr>
-        <p:spPr>
-          <a:xfrm>
-            <a:off x="822960" y="6355080"/>
-            <a:ext cx="10515600" cy="411480"/>
+            <a:off x="822960" y="1554480"/>
+            <a:ext cx="6675120" cy="4892040"/>
           </a:xfrm>
           <a:prstGeom prst="rect">
             <a:avLst/>
@@ -4915,19 +5087,156 @@
           <a:noFill/>
         </p:spPr>
         <p:txBody>
-          <a:bodyPr wrap="square">
-            <a:spAutoFit/>
-          </a:bodyPr>
-          <a:lstStyle/>
-          <a:p>
-            <a:r>
-              <a:rPr sz="1400" i="1">
-                <a:solidFill>
-                  <a:srgbClr val="595959"/>
-                </a:solidFill>
-                <a:latin typeface="Calibri"/>
-              </a:rPr>
-              <a:t>Handed out now — this is the sheet in your hands.</a:t>
+          <a:bodyPr wrap="square" lIns="91440" tIns="91440" rIns="91440" bIns="91440"/>
+          <a:lstStyle/>
+          <a:p>
+            <a:pPr marL="274320" indent="-274320">
+              <a:spcAft>
+                <a:spcPts val="900"/>
+              </a:spcAft>
+            </a:pPr>
+            <a:r>
+              <a:rPr sz="2800" b="1" i="0">
+                <a:solidFill>
+                  <a:srgbClr val="97BC62"/>
+                </a:solidFill>
+                <a:latin typeface="Calibri"/>
+              </a:rPr>
+              <a:t>•  </a:t>
+            </a:r>
+            <a:r>
+              <a:rPr sz="2800" b="0" i="0">
+                <a:solidFill>
+                  <a:srgbClr val="222B22"/>
+                </a:solidFill>
+                <a:latin typeface="Calibri"/>
+              </a:rPr>
+              <a:t>Two rounds, same as every session — the container holder first, then the content presenter: three things each</a:t>
+            </a:r>
+          </a:p>
+          <a:p>
+            <a:pPr marL="685800" indent="-274320">
+              <a:spcAft>
+                <a:spcPts val="700"/>
+              </a:spcAft>
+            </a:pPr>
+            <a:r>
+              <a:rPr sz="2000" b="1" i="0">
+                <a:solidFill>
+                  <a:srgbClr val="97BC62"/>
+                </a:solidFill>
+                <a:latin typeface="Calibri"/>
+              </a:rPr>
+              <a:t>–  </a:t>
+            </a:r>
+            <a:r>
+              <a:rPr sz="2000" b="0" i="1">
+                <a:solidFill>
+                  <a:srgbClr val="222B22"/>
+                </a:solidFill>
+                <a:latin typeface="Calibri"/>
+              </a:rPr>
+              <a:t>“What I think went well tonight: ______”</a:t>
+            </a:r>
+          </a:p>
+          <a:p>
+            <a:pPr marL="685800" indent="-274320">
+              <a:spcAft>
+                <a:spcPts val="700"/>
+              </a:spcAft>
+            </a:pPr>
+            <a:r>
+              <a:rPr sz="2000" b="1" i="0">
+                <a:solidFill>
+                  <a:srgbClr val="97BC62"/>
+                </a:solidFill>
+                <a:latin typeface="Calibri"/>
+              </a:rPr>
+              <a:t>–  </a:t>
+            </a:r>
+            <a:r>
+              <a:rPr sz="2000" b="0" i="1">
+                <a:solidFill>
+                  <a:srgbClr val="222B22"/>
+                </a:solidFill>
+                <a:latin typeface="Calibri"/>
+              </a:rPr>
+              <a:t>“What I’d do differently next time: ______”</a:t>
+            </a:r>
+          </a:p>
+          <a:p>
+            <a:pPr marL="685800" indent="-274320">
+              <a:spcAft>
+                <a:spcPts val="700"/>
+              </a:spcAft>
+            </a:pPr>
+            <a:r>
+              <a:rPr sz="2000" b="1" i="0">
+                <a:solidFill>
+                  <a:srgbClr val="97BC62"/>
+                </a:solidFill>
+                <a:latin typeface="Calibri"/>
+              </a:rPr>
+              <a:t>–  </a:t>
+            </a:r>
+            <a:r>
+              <a:rPr sz="2000" b="0" i="1">
+                <a:solidFill>
+                  <a:srgbClr val="222B22"/>
+                </a:solidFill>
+                <a:latin typeface="Calibri"/>
+              </a:rPr>
+              <a:t>“If I were to teach tonight’s process to someone, I would tell them: ______”</a:t>
+            </a:r>
+          </a:p>
+          <a:p>
+            <a:pPr marL="274320" indent="-274320">
+              <a:spcAft>
+                <a:spcPts val="900"/>
+              </a:spcAft>
+            </a:pPr>
+            <a:r>
+              <a:rPr sz="2800" b="1" i="0">
+                <a:solidFill>
+                  <a:srgbClr val="97BC62"/>
+                </a:solidFill>
+                <a:latin typeface="Calibri"/>
+              </a:rPr>
+              <a:t>•  </a:t>
+            </a:r>
+            <a:r>
+              <a:rPr sz="2800" b="0" i="0">
+                <a:solidFill>
+                  <a:srgbClr val="222B22"/>
+                </a:solidFill>
+                <a:latin typeface="Calibri"/>
+              </a:rPr>
+              <a:t>Then the room — the same two questions about tonight</a:t>
+            </a:r>
+          </a:p>
+          <a:p>
+            <a:pPr marL="274320" indent="-274320">
+              <a:spcAft>
+                <a:spcPts val="900"/>
+              </a:spcAft>
+            </a:pPr>
+            <a:r>
+              <a:rPr sz="2800" b="1" i="0">
+                <a:solidFill>
+                  <a:srgbClr val="97BC62"/>
+                </a:solidFill>
+                <a:latin typeface="Calibri"/>
+              </a:rPr>
+              <a:t>•  </a:t>
+            </a:r>
+            <a:r>
+              <a:rPr sz="2800" b="0" i="0">
+                <a:solidFill>
+                  <a:srgbClr val="222B22"/>
+                </a:solidFill>
+                <a:latin typeface="Calibri"/>
+              </a:rPr>
+              <a:t>The leaders receive without defending — “thank you” is the whole response</a:t>
             </a:r>
           </a:p>
         </p:txBody>
@@ -4954,7 +5263,7 @@
           <a:p>
             <a:pPr algn="r"/>
             <a:r>
-              <a:t>182</a:t>
+              <a:t>184</a:t>
             </a:r>
             <a:endParaRPr sz="1000" b="1">
               <a:solidFill>
@@ -4965,198 +5274,42 @@
           </a:p>
         </p:txBody>
       </p:sp>
-    </p:spTree>
-  </p:cSld>
-  <p:clrMapOvr>
-    <a:masterClrMapping/>
-  </p:clrMapOvr>
-</p:sld>
-</file>
-
-<file path=ppt/slides/slide12.xml><?xml version="1.0" encoding="utf-8"?>
-<p:sld xmlns:a="http://schemas.openxmlformats.org/drawingml/2006/main" xmlns:p="http://schemas.openxmlformats.org/presentationml/2006/main" xmlns:r="http://schemas.openxmlformats.org/officeDocument/2006/relationships">
-  <p:cSld>
-    <p:spTree>
-      <p:nvGrpSpPr>
-        <p:cNvPr id="1" name=""/>
-        <p:cNvGrpSpPr/>
-        <p:nvPr/>
-      </p:nvGrpSpPr>
-      <p:grpSpPr/>
-      <p:sp>
-        <p:nvSpPr>
-          <p:cNvPr id="2" name="Rectangle 1"/>
-          <p:cNvSpPr/>
-          <p:nvPr/>
-        </p:nvSpPr>
-        <p:spPr>
-          <a:xfrm>
-            <a:off x="0" y="0"/>
-            <a:ext cx="12192000" cy="6858000"/>
-          </a:xfrm>
-          <a:prstGeom prst="rect">
-            <a:avLst/>
-          </a:prstGeom>
-          <a:solidFill>
-            <a:srgbClr val="FFFFFF"/>
-          </a:solidFill>
-          <a:ln>
-            <a:noFill/>
-          </a:ln>
-          <a:effectLst/>
-        </p:spPr>
-        <p:style>
-          <a:lnRef idx="1">
-            <a:schemeClr val="accent1"/>
-          </a:lnRef>
-          <a:fillRef idx="3">
-            <a:schemeClr val="accent1"/>
-          </a:fillRef>
-          <a:effectRef idx="2">
-            <a:schemeClr val="accent1"/>
-          </a:effectRef>
-          <a:fontRef idx="minor">
-            <a:schemeClr val="lt1"/>
-          </a:fontRef>
-        </p:style>
-        <p:txBody>
-          <a:bodyPr rtlCol="0" anchor="ctr"/>
-          <a:lstStyle/>
-          <a:p>
-            <a:pPr algn="ctr"/>
-          </a:p>
-        </p:txBody>
-      </p:sp>
-      <p:sp>
-        <p:nvSpPr>
-          <p:cNvPr id="3" name="TextBox 2"/>
-          <p:cNvSpPr txBox="1"/>
-          <p:nvPr/>
-        </p:nvSpPr>
-        <p:spPr>
-          <a:xfrm>
-            <a:off x="822960" y="502920"/>
-            <a:ext cx="10515600" cy="822960"/>
-          </a:xfrm>
-          <a:prstGeom prst="rect">
-            <a:avLst/>
-          </a:prstGeom>
-          <a:noFill/>
-        </p:spPr>
-        <p:txBody>
-          <a:bodyPr wrap="square">
-            <a:spAutoFit/>
-          </a:bodyPr>
-          <a:lstStyle/>
-          <a:p>
-            <a:r>
-              <a:rPr sz="2800" b="1">
-                <a:solidFill>
-                  <a:srgbClr val="2C5F2D"/>
-                </a:solidFill>
-                <a:latin typeface="Cambria"/>
-              </a:rPr>
-              <a:t>The Take-Home Sheet — the Four Parts</a:t>
-            </a:r>
-          </a:p>
-        </p:txBody>
-      </p:sp>
       <p:pic>
         <p:nvPicPr>
-          <p:cNvPr id="4" name="Picture 3" descr="s14_part2.png"/>
+          <p:cNvPr id="33" name="Picture 33" descr="compass on the trail - the weekly bearing check"/>
           <p:cNvPicPr>
             <a:picLocks noChangeAspect="1"/>
           </p:cNvPicPr>
           <p:nvPr/>
         </p:nvPicPr>
         <p:blipFill>
-          <a:blip r:embed="rId2"/>
+          <a:blip r:embed="rId3"/>
           <a:stretch>
             <a:fillRect/>
           </a:stretch>
         </p:blipFill>
         <p:spPr>
           <a:xfrm>
-            <a:off x="2433167" y="1463040"/>
-            <a:ext cx="7325360" cy="4709160"/>
+            <a:off x="8106160" y="1463040"/>
+            <a:ext cx="3259831" cy="4892040"/>
           </a:xfrm>
           <a:prstGeom prst="rect">
             <a:avLst/>
           </a:prstGeom>
-          <a:ln w="12700">
+          <a:ln w="76200">
             <a:solidFill>
-              <a:srgbClr val="C8C8C8"/>
+              <a:srgbClr val="FFFFFF"/>
             </a:solidFill>
           </a:ln>
+          <a:effectLst>
+            <a:outerShdw blurRad="63500" dist="25400" dir="5400000" rotWithShape="0">
+              <a:srgbClr val="000000">
+                <a:alpha val="35000"/>
+              </a:srgbClr>
+            </a:outerShdw>
+          </a:effectLst>
         </p:spPr>
       </p:pic>
-      <p:sp>
-        <p:nvSpPr>
-          <p:cNvPr id="5" name="TextBox 4"/>
-          <p:cNvSpPr txBox="1"/>
-          <p:nvPr/>
-        </p:nvSpPr>
-        <p:spPr>
-          <a:xfrm>
-            <a:off x="822960" y="6355080"/>
-            <a:ext cx="10515600" cy="411480"/>
-          </a:xfrm>
-          <a:prstGeom prst="rect">
-            <a:avLst/>
-          </a:prstGeom>
-          <a:noFill/>
-        </p:spPr>
-        <p:txBody>
-          <a:bodyPr wrap="square">
-            <a:spAutoFit/>
-          </a:bodyPr>
-          <a:lstStyle/>
-          <a:p>
-            <a:r>
-              <a:rPr sz="1400" i="1">
-                <a:solidFill>
-                  <a:srgbClr val="595959"/>
-                </a:solidFill>
-                <a:latin typeface="Calibri"/>
-              </a:rPr>
-              <a:t>One practice at a time — and a partner expecting you at the end of week one.</a:t>
-            </a:r>
-          </a:p>
-        </p:txBody>
-      </p:sp>
-      <p:sp>
-        <p:nvSpPr>
-          <p:cNvPr id="90" name="SlideNum"/>
-          <p:cNvSpPr txBox="1"/>
-          <p:nvPr/>
-        </p:nvSpPr>
-        <p:spPr>
-          <a:xfrm>
-            <a:off x="11384280" y="6446520"/>
-            <a:ext cx="640080" cy="292608"/>
-          </a:xfrm>
-          <a:prstGeom prst="rect">
-            <a:avLst/>
-          </a:prstGeom>
-          <a:noFill/>
-        </p:spPr>
-        <p:txBody>
-          <a:bodyPr wrap="none" lIns="0" tIns="0" rIns="45720" bIns="0" anchor="ctr"/>
-          <a:lstStyle/>
-          <a:p>
-            <a:pPr algn="r"/>
-            <a:r>
-              <a:t>182a</a:t>
-            </a:r>
-            <a:endParaRPr sz="1000" b="1">
-              <a:solidFill>
-                <a:srgbClr val="7A8A6E"/>
-              </a:solidFill>
-              <a:latin typeface="Calibri"/>
-            </a:endParaRPr>
-          </a:p>
-        </p:txBody>
-      </p:sp>
     </p:spTree>
   </p:cSld>
   <p:clrMapOvr>
@@ -5415,6 +5568,211 @@
 </file>
 
 <file path=ppt/slides/slide3.xml><?xml version="1.0" encoding="utf-8"?>
+<p:sld xmlns:a="http://schemas.openxmlformats.org/drawingml/2006/main" xmlns:p="http://schemas.openxmlformats.org/presentationml/2006/main" xmlns:r="http://schemas.openxmlformats.org/officeDocument/2006/relationships">
+  <p:cSld>
+    <p:spTree>
+      <p:nvGrpSpPr>
+        <p:cNvPr id="1" name=""/>
+        <p:cNvGrpSpPr/>
+        <p:nvPr/>
+      </p:nvGrpSpPr>
+      <p:grpSpPr/>
+      <p:sp>
+        <p:nvSpPr>
+          <p:cNvPr id="2" name="Rectangle 1"/>
+          <p:cNvSpPr/>
+          <p:nvPr/>
+        </p:nvSpPr>
+        <p:spPr>
+          <a:xfrm>
+            <a:off x="0" y="0"/>
+            <a:ext cx="12192000" cy="6858000"/>
+          </a:xfrm>
+          <a:prstGeom prst="rect">
+            <a:avLst/>
+          </a:prstGeom>
+          <a:solidFill>
+            <a:srgbClr val="FFFFFF"/>
+          </a:solidFill>
+          <a:ln>
+            <a:noFill/>
+          </a:ln>
+          <a:effectLst/>
+        </p:spPr>
+        <p:style>
+          <a:lnRef idx="1">
+            <a:schemeClr val="accent1"/>
+          </a:lnRef>
+          <a:fillRef idx="3">
+            <a:schemeClr val="accent1"/>
+          </a:fillRef>
+          <a:effectRef idx="2">
+            <a:schemeClr val="accent1"/>
+          </a:effectRef>
+          <a:fontRef idx="minor">
+            <a:schemeClr val="lt1"/>
+          </a:fontRef>
+        </p:style>
+        <p:txBody>
+          <a:bodyPr rtlCol="0" anchor="ctr"/>
+          <a:lstStyle/>
+          <a:p>
+            <a:pPr algn="ctr"/>
+          </a:p>
+        </p:txBody>
+      </p:sp>
+      <p:sp>
+        <p:nvSpPr>
+          <p:cNvPr id="3" name="TextBox 2"/>
+          <p:cNvSpPr txBox="1"/>
+          <p:nvPr/>
+        </p:nvSpPr>
+        <p:spPr>
+          <a:xfrm>
+            <a:off x="822960" y="502920"/>
+            <a:ext cx="10515600" cy="822960"/>
+          </a:xfrm>
+          <a:prstGeom prst="rect">
+            <a:avLst/>
+          </a:prstGeom>
+          <a:noFill/>
+        </p:spPr>
+        <p:txBody>
+          <a:bodyPr wrap="square">
+            <a:spAutoFit/>
+          </a:bodyPr>
+          <a:lstStyle/>
+          <a:p>
+            <a:r>
+              <a:rPr sz="2800" b="1">
+                <a:solidFill>
+                  <a:srgbClr val="2C5F2D"/>
+                </a:solidFill>
+                <a:latin typeface="Cambria"/>
+              </a:rPr>
+              <a:t>Where We Are — the Four Connects</a:t>
+            </a:r>
+          </a:p>
+        </p:txBody>
+      </p:sp>
+      <p:sp>
+        <p:nvSpPr>
+          <p:cNvPr id="5" name="TextBox 4"/>
+          <p:cNvSpPr txBox="1"/>
+          <p:nvPr/>
+        </p:nvSpPr>
+        <p:spPr>
+          <a:xfrm>
+            <a:off x="822960" y="5623560"/>
+            <a:ext cx="10515600" cy="914400"/>
+          </a:xfrm>
+          <a:prstGeom prst="rect">
+            <a:avLst/>
+          </a:prstGeom>
+          <a:noFill/>
+        </p:spPr>
+        <p:txBody>
+          <a:bodyPr wrap="square">
+            <a:spAutoFit/>
+          </a:bodyPr>
+          <a:lstStyle/>
+          <a:p>
+            <a:r>
+              <a:rPr sz="1800" b="0">
+                <a:solidFill>
+                  <a:srgbClr val="222B22"/>
+                </a:solidFill>
+                <a:latin typeface="Calibri"/>
+              </a:rPr>
+              <a:t>Session 14 returns to the second and third boxes — </a:t>
+            </a:r>
+            <a:r>
+              <a:rPr sz="1800" b="1">
+                <a:solidFill>
+                  <a:srgbClr val="2C5F2D"/>
+                </a:solidFill>
+                <a:latin typeface="Calibri"/>
+              </a:rPr>
+              <a:t>Others and God</a:t>
+            </a:r>
+            <a:r>
+              <a:rPr sz="1800" b="0">
+                <a:solidFill>
+                  <a:srgbClr val="222B22"/>
+                </a:solidFill>
+                <a:latin typeface="Calibri"/>
+              </a:rPr>
+              <a:t> — walked again, teen-led. Each connection makes the next one real (Matt. 22:37–40).</a:t>
+            </a:r>
+          </a:p>
+        </p:txBody>
+      </p:sp>
+      <p:sp>
+        <p:nvSpPr>
+          <p:cNvPr id="90" name="SlideNum"/>
+          <p:cNvSpPr txBox="1"/>
+          <p:nvPr/>
+        </p:nvSpPr>
+        <p:spPr>
+          <a:xfrm>
+            <a:off x="11384280" y="6446520"/>
+            <a:ext cx="640080" cy="292608"/>
+          </a:xfrm>
+          <a:prstGeom prst="rect">
+            <a:avLst/>
+          </a:prstGeom>
+          <a:noFill/>
+        </p:spPr>
+        <p:txBody>
+          <a:bodyPr wrap="none" lIns="0" tIns="0" rIns="45720" bIns="0" anchor="ctr"/>
+          <a:lstStyle/>
+          <a:p>
+            <a:pPr algn="r"/>
+            <a:r>
+              <a:t>177a</a:t>
+            </a:r>
+            <a:endParaRPr sz="1000" b="1">
+              <a:solidFill>
+                <a:srgbClr val="7A8A6E"/>
+              </a:solidFill>
+              <a:latin typeface="Calibri"/>
+            </a:endParaRPr>
+          </a:p>
+        </p:txBody>
+      </p:sp>
+      <p:pic>
+        <p:nvPicPr>
+          <p:cNvPr id="91" name="Picture 90" descr="four-connects.png"/>
+          <p:cNvPicPr>
+            <a:picLocks noChangeAspect="1"/>
+          </p:cNvPicPr>
+          <p:nvPr/>
+        </p:nvPicPr>
+        <p:blipFill>
+          <a:blip r:embed="rId4"/>
+          <a:stretch>
+            <a:fillRect/>
+          </a:stretch>
+        </p:blipFill>
+        <p:spPr>
+          <a:xfrm>
+            <a:off x="932688" y="1645920"/>
+            <a:ext cx="10332720" cy="3708663"/>
+          </a:xfrm>
+          <a:prstGeom prst="rect">
+            <a:avLst/>
+          </a:prstGeom>
+        </p:spPr>
+      </p:pic>
+    </p:spTree>
+  </p:cSld>
+  <p:clrMapOvr>
+    <a:masterClrMapping/>
+  </p:clrMapOvr>
+</p:sld>
+</file>
+
+<file path=ppt/slides/slide4.xml><?xml version="1.0" encoding="utf-8"?>
 <p:sld xmlns:a="http://schemas.openxmlformats.org/drawingml/2006/main" xmlns:r="http://schemas.openxmlformats.org/officeDocument/2006/relationships" xmlns:p="http://schemas.openxmlformats.org/presentationml/2006/main">
   <p:cSld>
     <p:spTree>
@@ -5765,353 +6123,6 @@
 </p:sld>
 </file>
 
-<file path=ppt/slides/slide4.xml><?xml version="1.0" encoding="utf-8"?>
-<p:sld xmlns:a="http://schemas.openxmlformats.org/drawingml/2006/main" xmlns:r="http://schemas.openxmlformats.org/officeDocument/2006/relationships" xmlns:p="http://schemas.openxmlformats.org/presentationml/2006/main">
-  <p:cSld>
-    <p:spTree>
-      <p:nvGrpSpPr>
-        <p:cNvPr id="1" name=""/>
-        <p:cNvGrpSpPr/>
-        <p:nvPr/>
-      </p:nvGrpSpPr>
-      <p:grpSpPr>
-        <a:xfrm>
-          <a:off x="0" y="0"/>
-          <a:ext cx="0" cy="0"/>
-          <a:chOff x="0" y="0"/>
-          <a:chExt cx="0" cy="0"/>
-        </a:xfrm>
-      </p:grpSpPr>
-      <p:sp>
-        <p:nvSpPr>
-          <p:cNvPr id="2" name="Rectangle 1"/>
-          <p:cNvSpPr/>
-          <p:nvPr/>
-        </p:nvSpPr>
-        <p:spPr>
-          <a:xfrm>
-            <a:off x="0" y="0"/>
-            <a:ext cx="12191695" cy="6858000"/>
-          </a:xfrm>
-          <a:prstGeom prst="rect">
-            <a:avLst/>
-          </a:prstGeom>
-          <a:solidFill>
-            <a:srgbClr val="FFFFFF"/>
-          </a:solidFill>
-          <a:ln>
-            <a:noFill/>
-          </a:ln>
-        </p:spPr>
-        <p:txBody>
-          <a:bodyPr/>
-          <a:lstStyle/>
-          <a:p>
-            <a:endParaRPr/>
-          </a:p>
-        </p:txBody>
-      </p:sp>
-      <p:sp>
-        <p:nvSpPr>
-          <p:cNvPr id="3" name="TextBox 2"/>
-          <p:cNvSpPr txBox="1"/>
-          <p:nvPr/>
-        </p:nvSpPr>
-        <p:spPr>
-          <a:xfrm>
-            <a:off x="822960" y="502920"/>
-            <a:ext cx="10515600" cy="822960"/>
-          </a:xfrm>
-          <a:prstGeom prst="rect">
-            <a:avLst/>
-          </a:prstGeom>
-          <a:noFill/>
-        </p:spPr>
-        <p:txBody>
-          <a:bodyPr wrap="square">
-            <a:spAutoFit/>
-          </a:bodyPr>
-          <a:lstStyle/>
-          <a:p>
-            <a:pPr algn="l">
-              <a:spcAft>
-                <a:spcPts val="600"/>
-              </a:spcAft>
-            </a:pPr>
-            <a:r>
-              <a:rPr sz="2800" b="1" i="0">
-                <a:solidFill>
-                  <a:srgbClr val="2C5F2D"/>
-                </a:solidFill>
-                <a:latin typeface="Cambria"/>
-              </a:rPr>
-              <a:t>Opening Container — the Eight Steps</a:t>
-            </a:r>
-          </a:p>
-        </p:txBody>
-      </p:sp>
-      <p:sp>
-        <p:nvSpPr>
-          <p:cNvPr id="4" name="TextBox 4"/>
-          <p:cNvSpPr txBox="1"/>
-          <p:nvPr/>
-        </p:nvSpPr>
-        <p:spPr>
-          <a:xfrm>
-            <a:off x="822960" y="1554480"/>
-            <a:ext cx="10515600" cy="4892040"/>
-          </a:xfrm>
-          <a:prstGeom prst="rect">
-            <a:avLst/>
-          </a:prstGeom>
-          <a:noFill/>
-        </p:spPr>
-        <p:txBody>
-          <a:bodyPr wrap="square" lIns="91440" tIns="91440" rIns="91440" bIns="91440"/>
-          <a:lstStyle/>
-          <a:p>
-            <a:pPr marL="342900" indent="-342900">
-              <a:spcAft>
-                <a:spcPts val="650"/>
-              </a:spcAft>
-            </a:pPr>
-            <a:r>
-              <a:rPr sz="2400" b="1" i="0">
-                <a:solidFill>
-                  <a:srgbClr val="97BC62"/>
-                </a:solidFill>
-                <a:latin typeface="Calibri"/>
-              </a:rPr>
-              <a:t>1   </a:t>
-            </a:r>
-            <a:r>
-              <a:rPr sz="2400" b="0" i="0">
-                <a:solidFill>
-                  <a:srgbClr val="222B22"/>
-                </a:solidFill>
-                <a:latin typeface="Calibri"/>
-              </a:rPr>
-              <a:t>Welcome — five minutes to open the container</a:t>
-            </a:r>
-          </a:p>
-          <a:p>
-            <a:pPr marL="342900" indent="-342900">
-              <a:spcAft>
-                <a:spcPts val="650"/>
-              </a:spcAft>
-            </a:pPr>
-            <a:r>
-              <a:rPr sz="2400" b="1" i="0">
-                <a:solidFill>
-                  <a:srgbClr val="97BC62"/>
-                </a:solidFill>
-                <a:latin typeface="Calibri"/>
-              </a:rPr>
-              <a:t>2   </a:t>
-            </a:r>
-            <a:r>
-              <a:rPr sz="2400" b="0" i="0">
-                <a:solidFill>
-                  <a:srgbClr val="222B22"/>
-                </a:solidFill>
-                <a:latin typeface="Calibri"/>
-              </a:rPr>
-              <a:t>Phones silenced and put away</a:t>
-            </a:r>
-          </a:p>
-          <a:p>
-            <a:pPr marL="342900" indent="-342900">
-              <a:spcAft>
-                <a:spcPts val="650"/>
-              </a:spcAft>
-            </a:pPr>
-            <a:r>
-              <a:rPr sz="2400" b="1" i="0">
-                <a:solidFill>
-                  <a:srgbClr val="97BC62"/>
-                </a:solidFill>
-                <a:latin typeface="Calibri"/>
-              </a:rPr>
-              <a:t>3   </a:t>
-            </a:r>
-            <a:r>
-              <a:rPr sz="2400" b="0" i="0">
-                <a:solidFill>
-                  <a:srgbClr val="222B22"/>
-                </a:solidFill>
-                <a:latin typeface="Calibri"/>
-              </a:rPr>
-              <a:t>Stand in a circle</a:t>
-            </a:r>
-          </a:p>
-          <a:p>
-            <a:pPr marL="342900" indent="-342900">
-              <a:spcAft>
-                <a:spcPts val="650"/>
-              </a:spcAft>
-            </a:pPr>
-            <a:r>
-              <a:rPr sz="2400" b="1" i="0">
-                <a:solidFill>
-                  <a:srgbClr val="97BC62"/>
-                </a:solidFill>
-                <a:latin typeface="Calibri"/>
-              </a:rPr>
-              <a:t>4   </a:t>
-            </a:r>
-            <a:r>
-              <a:rPr sz="2400" b="0" i="0">
-                <a:solidFill>
-                  <a:srgbClr val="222B22"/>
-                </a:solidFill>
-                <a:latin typeface="Calibri"/>
-              </a:rPr>
-              <a:t>One-word check-in — how you actually are, right now</a:t>
-            </a:r>
-          </a:p>
-          <a:p>
-            <a:pPr marL="342900" indent="-342900">
-              <a:spcAft>
-                <a:spcPts val="650"/>
-              </a:spcAft>
-            </a:pPr>
-            <a:r>
-              <a:rPr sz="2400" b="1" i="0">
-                <a:solidFill>
-                  <a:srgbClr val="97BC62"/>
-                </a:solidFill>
-                <a:latin typeface="Calibri"/>
-              </a:rPr>
-              <a:t>5   </a:t>
-            </a:r>
-            <a:r>
-              <a:rPr sz="2400" b="0" i="0">
-                <a:solidFill>
-                  <a:srgbClr val="222B22"/>
-                </a:solidFill>
-                <a:latin typeface="Calibri"/>
-              </a:rPr>
-              <a:t>Put out / bring in — set something down; bring a blessing in</a:t>
-            </a:r>
-          </a:p>
-          <a:p>
-            <a:pPr marL="342900" indent="-342900">
-              <a:spcAft>
-                <a:spcPts val="650"/>
-              </a:spcAft>
-            </a:pPr>
-            <a:r>
-              <a:rPr sz="2400" b="1" i="0">
-                <a:solidFill>
-                  <a:srgbClr val="97BC62"/>
-                </a:solidFill>
-                <a:latin typeface="Calibri"/>
-              </a:rPr>
-              <a:t>6   </a:t>
-            </a:r>
-            <a:r>
-              <a:rPr sz="2400" b="0" i="0">
-                <a:solidFill>
-                  <a:srgbClr val="222B22"/>
-                </a:solidFill>
-                <a:latin typeface="Calibri"/>
-              </a:rPr>
-              <a:t>Spoken commitment: “I am here. I am paying attention. I am willing to be moved.”</a:t>
-            </a:r>
-          </a:p>
-          <a:p>
-            <a:pPr marL="342900" indent="-342900">
-              <a:spcAft>
-                <a:spcPts val="650"/>
-              </a:spcAft>
-            </a:pPr>
-            <a:r>
-              <a:rPr sz="2400" b="1" i="0">
-                <a:solidFill>
-                  <a:srgbClr val="97BC62"/>
-                </a:solidFill>
-                <a:latin typeface="Calibri"/>
-              </a:rPr>
-              <a:t>7   </a:t>
-            </a:r>
-            <a:r>
-              <a:rPr sz="2400" b="0" i="0">
-                <a:solidFill>
-                  <a:srgbClr val="222B22"/>
-                </a:solidFill>
-                <a:latin typeface="Calibri"/>
-              </a:rPr>
-              <a:t>Opening prayer — “Holy Spirit, you are welcome here. Speak. We are listening.”</a:t>
-            </a:r>
-          </a:p>
-          <a:p>
-            <a:pPr marL="342900" indent="-342900">
-              <a:spcAft>
-                <a:spcPts val="650"/>
-              </a:spcAft>
-            </a:pPr>
-            <a:r>
-              <a:rPr sz="2400" b="1" i="0">
-                <a:solidFill>
-                  <a:srgbClr val="97BC62"/>
-                </a:solidFill>
-                <a:latin typeface="Calibri"/>
-              </a:rPr>
-              <a:t>8   </a:t>
-            </a:r>
-            <a:r>
-              <a:rPr sz="2400" b="0" i="0">
-                <a:solidFill>
-                  <a:srgbClr val="222B22"/>
-                </a:solidFill>
-                <a:latin typeface="Calibri"/>
-              </a:rPr>
-              <a:t>Sit. Begin.</a:t>
-            </a:r>
-          </a:p>
-        </p:txBody>
-      </p:sp>
-      <p:sp>
-        <p:nvSpPr>
-          <p:cNvPr id="90" name="SlideNum"/>
-          <p:cNvSpPr txBox="1"/>
-          <p:nvPr/>
-        </p:nvSpPr>
-        <p:spPr>
-          <a:xfrm>
-            <a:off x="11384280" y="6446520"/>
-            <a:ext cx="640080" cy="292608"/>
-          </a:xfrm>
-          <a:prstGeom prst="rect">
-            <a:avLst/>
-          </a:prstGeom>
-          <a:noFill/>
-        </p:spPr>
-        <p:txBody>
-          <a:bodyPr wrap="none" lIns="0" tIns="0" rIns="45720" bIns="0" anchor="ctr"/>
-          <a:lstStyle/>
-          <a:p>
-            <a:pPr algn="r"/>
-            <a:r>
-              <a:t>179</a:t>
-            </a:r>
-            <a:endParaRPr sz="1000" b="1">
-              <a:solidFill>
-                <a:srgbClr val="7A8A6E"/>
-              </a:solidFill>
-              <a:latin typeface="Calibri"/>
-            </a:endParaRPr>
-          </a:p>
-        </p:txBody>
-      </p:sp>
-    </p:spTree>
-  </p:cSld>
-  <p:clrMapOvr>
-    <a:masterClrMapping/>
-  </p:clrMapOvr>
-</p:sld>
-</file>
-
 <file path=ppt/slides/slide5.xml><?xml version="1.0" encoding="utf-8"?>
 <p:sld xmlns:a="http://schemas.openxmlformats.org/drawingml/2006/main" xmlns:r="http://schemas.openxmlformats.org/officeDocument/2006/relationships" xmlns:p="http://schemas.openxmlformats.org/presentationml/2006/main">
   <p:cSld>
@@ -6192,7 +6203,7 @@
                 </a:solidFill>
                 <a:latin typeface="Cambria"/>
               </a:rPr>
-              <a:t>The Mission Round</a:t>
+              <a:t>Opening Container — the Eight Steps</a:t>
             </a:r>
           </a:p>
         </p:txBody>
@@ -6217,103 +6228,203 @@
           <a:bodyPr wrap="square" lIns="91440" tIns="91440" rIns="91440" bIns="91440"/>
           <a:lstStyle/>
           <a:p>
-            <a:pPr marL="274320" indent="-274320">
+            <a:pPr marL="342900" indent="-342900">
               <a:spcAft>
-                <a:spcPts val="900"/>
+                <a:spcPts val="650"/>
               </a:spcAft>
             </a:pPr>
             <a:r>
-              <a:rPr sz="2800" b="1" i="0">
+              <a:rPr sz="2400" b="1" i="0">
                 <a:solidFill>
                   <a:srgbClr val="97BC62"/>
                 </a:solidFill>
                 <a:latin typeface="Calibri"/>
               </a:rPr>
-              <a:t>•  </a:t>
-            </a:r>
-            <a:r>
-              <a:rPr sz="2800" b="0" i="0">
+              <a:t>1   </a:t>
+            </a:r>
+            <a:r>
+              <a:rPr sz="2400" b="0" i="0">
                 <a:solidFill>
                   <a:srgbClr val="222B22"/>
                 </a:solidFill>
                 <a:latin typeface="Calibri"/>
               </a:rPr>
-              <a:t>The Mission night sent us home with one assignment — one small act, lined up with your downhill mission</a:t>
-            </a:r>
-          </a:p>
-          <a:p>
-            <a:pPr marL="274320" indent="-274320">
+              <a:t>Welcome — five minutes to open the container</a:t>
+            </a:r>
+          </a:p>
+          <a:p>
+            <a:pPr marL="342900" indent="-342900">
               <a:spcAft>
-                <a:spcPts val="900"/>
+                <a:spcPts val="650"/>
               </a:spcAft>
             </a:pPr>
             <a:r>
-              <a:rPr sz="2800" b="1" i="0">
+              <a:rPr sz="2400" b="1" i="0">
                 <a:solidFill>
                   <a:srgbClr val="97BC62"/>
                 </a:solidFill>
                 <a:latin typeface="Calibri"/>
               </a:rPr>
-              <a:t>•  </a:t>
-            </a:r>
-            <a:r>
-              <a:rPr sz="2800" b="0" i="0">
+              <a:t>2   </a:t>
+            </a:r>
+            <a:r>
+              <a:rPr sz="2400" b="0" i="0">
                 <a:solidFill>
                   <a:srgbClr val="222B22"/>
                 </a:solidFill>
                 <a:latin typeface="Calibri"/>
               </a:rPr>
-              <a:t>“One sentence each, whoever wants: what was your one act, or what got in the way?”</a:t>
-            </a:r>
-          </a:p>
-          <a:p>
-            <a:pPr marL="274320" indent="-274320">
+              <a:t>Phones silenced and put away</a:t>
+            </a:r>
+          </a:p>
+          <a:p>
+            <a:pPr marL="342900" indent="-342900">
               <a:spcAft>
-                <a:spcPts val="900"/>
+                <a:spcPts val="650"/>
               </a:spcAft>
             </a:pPr>
             <a:r>
-              <a:rPr sz="2800" b="1" i="0">
+              <a:rPr sz="2400" b="1" i="0">
                 <a:solidFill>
                   <a:srgbClr val="97BC62"/>
                 </a:solidFill>
                 <a:latin typeface="Calibri"/>
               </a:rPr>
-              <a:t>•  </a:t>
-            </a:r>
-            <a:r>
-              <a:rPr sz="2800" b="0" i="0">
+              <a:t>3   </a:t>
+            </a:r>
+            <a:r>
+              <a:rPr sz="2400" b="0" i="0">
                 <a:solidFill>
                   <a:srgbClr val="222B22"/>
                 </a:solidFill>
                 <a:latin typeface="Calibri"/>
               </a:rPr>
-              <a:t>“‘I didn’t get to it’ is an honest sentence.” A parent opens; pass anytime</a:t>
-            </a:r>
-          </a:p>
-          <a:p>
-            <a:pPr marL="274320" indent="-274320">
+              <a:t>Stand in a circle</a:t>
+            </a:r>
+          </a:p>
+          <a:p>
+            <a:pPr marL="342900" indent="-342900">
               <a:spcAft>
-                <a:spcPts val="900"/>
+                <a:spcPts val="650"/>
               </a:spcAft>
             </a:pPr>
             <a:r>
-              <a:rPr sz="2800" b="1" i="0">
+              <a:rPr sz="2400" b="1" i="0">
                 <a:solidFill>
                   <a:srgbClr val="97BC62"/>
                 </a:solidFill>
                 <a:latin typeface="Calibri"/>
               </a:rPr>
-              <a:t>•  </a:t>
-            </a:r>
-            <a:r>
-              <a:rPr sz="2800" b="0" i="0">
+              <a:t>4   </a:t>
+            </a:r>
+            <a:r>
+              <a:rPr sz="2400" b="0" i="0">
                 <a:solidFill>
                   <a:srgbClr val="222B22"/>
                 </a:solidFill>
                 <a:latin typeface="Calibri"/>
               </a:rPr>
-              <a:t>“The works were prepared beforehand; we keep walking into them. That assignment doesn’t expire.”</a:t>
+              <a:t>One-word check-in — how you actually are, right now</a:t>
+            </a:r>
+          </a:p>
+          <a:p>
+            <a:pPr marL="342900" indent="-342900">
+              <a:spcAft>
+                <a:spcPts val="650"/>
+              </a:spcAft>
+            </a:pPr>
+            <a:r>
+              <a:rPr sz="2400" b="1" i="0">
+                <a:solidFill>
+                  <a:srgbClr val="97BC62"/>
+                </a:solidFill>
+                <a:latin typeface="Calibri"/>
+              </a:rPr>
+              <a:t>5   </a:t>
+            </a:r>
+            <a:r>
+              <a:rPr sz="2400" b="0" i="0">
+                <a:solidFill>
+                  <a:srgbClr val="222B22"/>
+                </a:solidFill>
+                <a:latin typeface="Calibri"/>
+              </a:rPr>
+              <a:t>Put out / bring in — set something down; bring a blessing in</a:t>
+            </a:r>
+          </a:p>
+          <a:p>
+            <a:pPr marL="342900" indent="-342900">
+              <a:spcAft>
+                <a:spcPts val="650"/>
+              </a:spcAft>
+            </a:pPr>
+            <a:r>
+              <a:rPr sz="2400" b="1" i="0">
+                <a:solidFill>
+                  <a:srgbClr val="97BC62"/>
+                </a:solidFill>
+                <a:latin typeface="Calibri"/>
+              </a:rPr>
+              <a:t>6   </a:t>
+            </a:r>
+            <a:r>
+              <a:rPr sz="2400" b="0" i="0">
+                <a:solidFill>
+                  <a:srgbClr val="222B22"/>
+                </a:solidFill>
+                <a:latin typeface="Calibri"/>
+              </a:rPr>
+              <a:t>Spoken commitment: “I am here. I am paying attention. I am willing to be moved.”</a:t>
+            </a:r>
+          </a:p>
+          <a:p>
+            <a:pPr marL="342900" indent="-342900">
+              <a:spcAft>
+                <a:spcPts val="650"/>
+              </a:spcAft>
+            </a:pPr>
+            <a:r>
+              <a:rPr sz="2400" b="1" i="0">
+                <a:solidFill>
+                  <a:srgbClr val="97BC62"/>
+                </a:solidFill>
+                <a:latin typeface="Calibri"/>
+              </a:rPr>
+              <a:t>7   </a:t>
+            </a:r>
+            <a:r>
+              <a:rPr sz="2400" b="0" i="0">
+                <a:solidFill>
+                  <a:srgbClr val="222B22"/>
+                </a:solidFill>
+                <a:latin typeface="Calibri"/>
+              </a:rPr>
+              <a:t>Opening prayer — “Holy Spirit, you are welcome here. Speak. We are listening.”</a:t>
+            </a:r>
+          </a:p>
+          <a:p>
+            <a:pPr marL="342900" indent="-342900">
+              <a:spcAft>
+                <a:spcPts val="650"/>
+              </a:spcAft>
+            </a:pPr>
+            <a:r>
+              <a:rPr sz="2400" b="1" i="0">
+                <a:solidFill>
+                  <a:srgbClr val="97BC62"/>
+                </a:solidFill>
+                <a:latin typeface="Calibri"/>
+              </a:rPr>
+              <a:t>8   </a:t>
+            </a:r>
+            <a:r>
+              <a:rPr sz="2400" b="0" i="0">
+                <a:solidFill>
+                  <a:srgbClr val="222B22"/>
+                </a:solidFill>
+                <a:latin typeface="Calibri"/>
+              </a:rPr>
+              <a:t>Sit. Begin.</a:t>
             </a:r>
           </a:p>
         </p:txBody>
@@ -6340,7 +6451,7 @@
           <a:p>
             <a:pPr algn="r"/>
             <a:r>
-              <a:t>180</a:t>
+              <a:t>179</a:t>
             </a:r>
             <a:endParaRPr sz="1000" b="1">
               <a:solidFill>
@@ -6439,7 +6550,7 @@
                 </a:solidFill>
                 <a:latin typeface="Cambria"/>
               </a:rPr>
-              <a:t>Why Tonight — the Rotation’s Charter</a:t>
+              <a:t>The Mission Round</a:t>
             </a:r>
           </a:p>
         </p:txBody>
@@ -6452,8 +6563,8 @@
         </p:nvSpPr>
         <p:spPr>
           <a:xfrm>
-            <a:off x="822960" y="1600200"/>
-            <a:ext cx="5669280" cy="4572000"/>
+            <a:off x="822960" y="1554480"/>
+            <a:ext cx="10515600" cy="4892040"/>
           </a:xfrm>
           <a:prstGeom prst="rect">
             <a:avLst/>
@@ -6466,11 +6577,11 @@
           <a:p>
             <a:pPr marL="274320" indent="-274320">
               <a:spcAft>
-                <a:spcPts val="800"/>
+                <a:spcPts val="900"/>
               </a:spcAft>
             </a:pPr>
             <a:r>
-              <a:rPr sz="2000" b="1" i="0">
+              <a:rPr sz="2800" b="1" i="0">
                 <a:solidFill>
                   <a:srgbClr val="97BC62"/>
                 </a:solidFill>
@@ -6479,168 +6590,88 @@
               <a:t>•  </a:t>
             </a:r>
             <a:r>
-              <a:rPr sz="2000" b="0" i="0">
+              <a:rPr sz="2800" b="0" i="0">
                 <a:solidFill>
                   <a:srgbClr val="222B22"/>
                 </a:solidFill>
                 <a:latin typeface="Calibri"/>
               </a:rPr>
-              <a:t>Nothing new gets taught tonight — on purpose. Everything we do, this room has already done</a:t>
+              <a:t>The Mission night sent us home with one assignment — one small act, lined up with your downhill mission</a:t>
             </a:r>
           </a:p>
           <a:p>
             <a:pPr marL="274320" indent="-274320">
-              <a:spcAft>
-                <a:spcPts val="800"/>
-              </a:spcAft>
-            </a:pPr>
-            <a:r>
-              <a:rPr sz="2000" b="1" i="0">
-                <a:solidFill>
-                  <a:srgbClr val="97BC62"/>
-                </a:solidFill>
-                <a:latin typeface="Calibri"/>
-              </a:rPr>
-              <a:t>•  </a:t>
-            </a:r>
-            <a:r>
-              <a:rPr sz="2000" b="0" i="0">
-                <a:solidFill>
-                  <a:srgbClr val="222B22"/>
-                </a:solidFill>
-                <a:latin typeface="Calibri"/>
-              </a:rPr>
-              <a:t>See one, do one, in front of each other — every one of us who is willing, not just the seniors headed for commissioning</a:t>
-            </a:r>
-          </a:p>
-          <a:p>
-            <a:pPr marL="274320" indent="-274320">
-              <a:spcAft>
-                <a:spcPts val="800"/>
-              </a:spcAft>
-            </a:pPr>
-            <a:r>
-              <a:rPr sz="2000" b="1" i="0">
-                <a:solidFill>
-                  <a:srgbClr val="97BC62"/>
-                </a:solidFill>
-                <a:latin typeface="Calibri"/>
-              </a:rPr>
-              <a:t>•  </a:t>
-            </a:r>
-            <a:r>
-              <a:rPr sz="2000" b="0" i="0">
-                <a:solidFill>
-                  <a:srgbClr val="222B22"/>
-                </a:solidFill>
-                <a:latin typeface="Calibri"/>
-              </a:rPr>
-              <a:t>“My turn is tonight. Somebody else’s turn is coming.”</a:t>
-            </a:r>
-          </a:p>
-          <a:p>
-            <a:pPr marL="274320" indent="-274320">
-              <a:spcAft>
-                <a:spcPts val="800"/>
-              </a:spcAft>
-            </a:pPr>
-            <a:r>
-              <a:rPr sz="2000" b="1" i="0">
-                <a:solidFill>
-                  <a:srgbClr val="97BC62"/>
-                </a:solidFill>
-                <a:latin typeface="Calibri"/>
-              </a:rPr>
-              <a:t>•  </a:t>
-            </a:r>
-            <a:r>
-              <a:rPr sz="2000" b="0" i="0">
-                <a:solidFill>
-                  <a:srgbClr val="222B22"/>
-                </a:solidFill>
-                <a:latin typeface="Calibri"/>
-              </a:rPr>
-              <a:t>This is not a competition — no ranking. The room’s job for every leader is the same: receive them</a:t>
-            </a:r>
-          </a:p>
-          <a:p>
-            <a:pPr marL="274320" indent="-274320">
-              <a:spcAft>
-                <a:spcPts val="800"/>
-              </a:spcAft>
-            </a:pPr>
-            <a:r>
-              <a:rPr sz="2000" b="1" i="0">
-                <a:solidFill>
-                  <a:srgbClr val="97BC62"/>
-                </a:solidFill>
-                <a:latin typeface="Calibri"/>
-              </a:rPr>
-              <a:t>•  </a:t>
-            </a:r>
-            <a:r>
-              <a:rPr sz="2000" b="0" i="0">
-                <a:solidFill>
-                  <a:srgbClr val="222B22"/>
-                </a:solidFill>
-                <a:latin typeface="Calibri"/>
-              </a:rPr>
-              <a:t>“The team is here. But the practice is ours now.”</a:t>
-            </a:r>
-          </a:p>
-        </p:txBody>
-      </p:sp>
-      <p:sp>
-        <p:nvSpPr>
-          <p:cNvPr id="6" name="TextBox 6"/>
-          <p:cNvSpPr txBox="1"/>
-          <p:nvPr/>
-        </p:nvSpPr>
-        <p:spPr>
-          <a:xfrm>
-            <a:off x="6766560" y="1737360"/>
-            <a:ext cx="4663440" cy="2194560"/>
-          </a:xfrm>
-          <a:prstGeom prst="rect">
-            <a:avLst/>
-          </a:prstGeom>
-          <a:solidFill>
-            <a:srgbClr val="F1F6EC"/>
-          </a:solidFill>
-        </p:spPr>
-        <p:txBody>
-          <a:bodyPr wrap="square" lIns="91440" tIns="91440" rIns="91440" bIns="91440" anchor="ctr"/>
-          <a:lstStyle/>
-          <a:p>
-            <a:pPr>
               <a:spcAft>
                 <a:spcPts val="900"/>
               </a:spcAft>
             </a:pPr>
             <a:r>
-              <a:rPr sz="1200" b="1" i="0">
+              <a:rPr sz="2800" b="1" i="0">
                 <a:solidFill>
                   <a:srgbClr val="97BC62"/>
                 </a:solidFill>
                 <a:latin typeface="Calibri"/>
               </a:rPr>
-              <a:t>1 TIMOTHY 4:12</a:t>
-            </a:r>
-          </a:p>
-          <a:p>
-            <a:pPr>
+              <a:t>•  </a:t>
+            </a:r>
+            <a:r>
+              <a:rPr sz="2800" b="0" i="0">
+                <a:solidFill>
+                  <a:srgbClr val="222B22"/>
+                </a:solidFill>
+                <a:latin typeface="Calibri"/>
+              </a:rPr>
+              <a:t>“One sentence each, whoever wants: what was your one act, or what got in the way?”</a:t>
+            </a:r>
+          </a:p>
+          <a:p>
+            <a:pPr marL="274320" indent="-274320">
               <a:spcAft>
-                <a:spcPts val="600"/>
+                <a:spcPts val="900"/>
               </a:spcAft>
             </a:pPr>
             <a:r>
-              <a:rPr sz="2400" b="0" i="1">
+              <a:rPr sz="2800" b="1" i="0">
+                <a:solidFill>
+                  <a:srgbClr val="97BC62"/>
+                </a:solidFill>
+                <a:latin typeface="Calibri"/>
+              </a:rPr>
+              <a:t>•  </a:t>
+            </a:r>
+            <a:r>
+              <a:rPr sz="2800" b="0" i="0">
                 <a:solidFill>
                   <a:srgbClr val="222B22"/>
                 </a:solidFill>
-                <a:latin typeface="Cambria"/>
-              </a:rPr>
-              <a:t>“Let no one despise you for your youth, but set the believers an example in speech, in conduct, in love, in faith, in purity.”</a:t>
+                <a:latin typeface="Calibri"/>
+              </a:rPr>
+              <a:t>“‘I didn’t get to it’ is an honest sentence.” A parent opens; pass anytime</a:t>
+            </a:r>
+          </a:p>
+          <a:p>
+            <a:pPr marL="274320" indent="-274320">
+              <a:spcAft>
+                <a:spcPts val="900"/>
+              </a:spcAft>
+            </a:pPr>
+            <a:r>
+              <a:rPr sz="2800" b="1" i="0">
+                <a:solidFill>
+                  <a:srgbClr val="97BC62"/>
+                </a:solidFill>
+                <a:latin typeface="Calibri"/>
+              </a:rPr>
+              <a:t>•  </a:t>
+            </a:r>
+            <a:r>
+              <a:rPr sz="2800" b="0" i="0">
+                <a:solidFill>
+                  <a:srgbClr val="222B22"/>
+                </a:solidFill>
+                <a:latin typeface="Calibri"/>
+              </a:rPr>
+              <a:t>“The works were prepared beforehand; we keep walking into them. That assignment doesn’t expire.”</a:t>
             </a:r>
           </a:p>
         </p:txBody>
@@ -6667,7 +6698,7 @@
           <a:p>
             <a:pPr algn="r"/>
             <a:r>
-              <a:t>181</a:t>
+              <a:t>180</a:t>
             </a:r>
             <a:endParaRPr sz="1000" b="1">
               <a:solidFill>
@@ -6686,7 +6717,7 @@
 </p:sld>
 </file>
 
-<file path=ppt/slides/slide8.xml><?xml version="1.0" encoding="utf-8"?>
+<file path=ppt/slides/slide7.xml><?xml version="1.0" encoding="utf-8"?>
 <p:sld xmlns:a="http://schemas.openxmlformats.org/drawingml/2006/main" xmlns:r="http://schemas.openxmlformats.org/officeDocument/2006/relationships" xmlns:p="http://schemas.openxmlformats.org/presentationml/2006/main">
   <p:cSld>
     <p:spTree>
@@ -6766,7 +6797,7 @@
                 </a:solidFill>
                 <a:latin typeface="Cambria"/>
               </a:rPr>
-              <a:t>Closing the Container + Aaronic Blessing</a:t>
+              <a:t>Why Tonight — the Rotation’s Charter</a:t>
             </a:r>
           </a:p>
         </p:txBody>
@@ -6793,11 +6824,11 @@
           <a:p>
             <a:pPr marL="274320" indent="-274320">
               <a:spcAft>
-                <a:spcPts val="900"/>
+                <a:spcPts val="800"/>
               </a:spcAft>
             </a:pPr>
             <a:r>
-              <a:rPr sz="2200" b="1" i="0">
+              <a:rPr sz="2000" b="1" i="0">
                 <a:solidFill>
                   <a:srgbClr val="97BC62"/>
                 </a:solidFill>
@@ -6806,19 +6837,19 @@
               <a:t>•  </a:t>
             </a:r>
             <a:r>
-              <a:rPr sz="2200" b="0" i="0">
+              <a:rPr sz="2000" b="0" i="0">
                 <a:solidFill>
                   <a:srgbClr val="222B22"/>
                 </a:solidFill>
                 <a:latin typeface="Calibri"/>
               </a:rPr>
-              <a:t>We close the way we opened — the container, six steps:</a:t>
-            </a:r>
-          </a:p>
-          <a:p>
-            <a:pPr marL="685800" indent="-274320">
+              <a:t>Nothing new gets taught tonight — on purpose. Everything we do, this room has already done</a:t>
+            </a:r>
+          </a:p>
+          <a:p>
+            <a:pPr marL="274320" indent="-274320">
               <a:spcAft>
-                <a:spcPts val="700"/>
+                <a:spcPts val="800"/>
               </a:spcAft>
             </a:pPr>
             <a:r>
@@ -6828,7 +6859,7 @@
                 </a:solidFill>
                 <a:latin typeface="Calibri"/>
               </a:rPr>
-              <a:t>1   </a:t>
+              <a:t>•  </a:t>
             </a:r>
             <a:r>
               <a:rPr sz="2000" b="0" i="0">
@@ -6837,13 +6868,13 @@
                 </a:solidFill>
                 <a:latin typeface="Calibri"/>
               </a:rPr>
-              <a:t>Stand again — same circle, same posture as the open</a:t>
-            </a:r>
-          </a:p>
-          <a:p>
-            <a:pPr marL="685800" indent="-274320">
+              <a:t>See one, do one, in front of each other — every one of us who is willing, not just the seniors headed for commissioning</a:t>
+            </a:r>
+          </a:p>
+          <a:p>
+            <a:pPr marL="274320" indent="-274320">
               <a:spcAft>
-                <a:spcPts val="700"/>
+                <a:spcPts val="800"/>
               </a:spcAft>
             </a:pPr>
             <a:r>
@@ -6853,7 +6884,7 @@
                 </a:solidFill>
                 <a:latin typeface="Calibri"/>
               </a:rPr>
-              <a:t>2   </a:t>
+              <a:t>•  </a:t>
             </a:r>
             <a:r>
               <a:rPr sz="2000" b="0" i="0">
@@ -6862,13 +6893,13 @@
                 </a:solidFill>
                 <a:latin typeface="Calibri"/>
               </a:rPr>
-              <a:t>One-word landing — compare it to your opening word</a:t>
-            </a:r>
-          </a:p>
-          <a:p>
-            <a:pPr marL="685800" indent="-274320">
+              <a:t>“My turn is tonight. Somebody else’s turn is coming.”</a:t>
+            </a:r>
+          </a:p>
+          <a:p>
+            <a:pPr marL="274320" indent="-274320">
               <a:spcAft>
-                <a:spcPts val="700"/>
+                <a:spcPts val="800"/>
               </a:spcAft>
             </a:pPr>
             <a:r>
@@ -6878,7 +6909,7 @@
                 </a:solidFill>
                 <a:latin typeface="Calibri"/>
               </a:rPr>
-              <a:t>3   </a:t>
+              <a:t>•  </a:t>
             </a:r>
             <a:r>
               <a:rPr sz="2000" b="0" i="0">
@@ -6887,13 +6918,13 @@
                 </a:solidFill>
                 <a:latin typeface="Calibri"/>
               </a:rPr>
-              <a:t>The one thing you are taking from tonight</a:t>
-            </a:r>
-          </a:p>
-          <a:p>
-            <a:pPr marL="685800" indent="-274320">
+              <a:t>This is not a competition — no ranking. The room’s job for every leader is the same: receive them</a:t>
+            </a:r>
+          </a:p>
+          <a:p>
+            <a:pPr marL="274320" indent="-274320">
               <a:spcAft>
-                <a:spcPts val="700"/>
+                <a:spcPts val="800"/>
               </a:spcAft>
             </a:pPr>
             <a:r>
@@ -6903,7 +6934,7 @@
                 </a:solidFill>
                 <a:latin typeface="Calibri"/>
               </a:rPr>
-              <a:t>4   </a:t>
+              <a:t>•  </a:t>
             </a:r>
             <a:r>
               <a:rPr sz="2000" b="0" i="0">
@@ -6912,57 +6943,7 @@
                 </a:solidFill>
                 <a:latin typeface="Calibri"/>
               </a:rPr>
-              <a:t>The one practice — committed aloud, or modified to one you will actually keep</a:t>
-            </a:r>
-          </a:p>
-          <a:p>
-            <a:pPr marL="685800" indent="-274320">
-              <a:spcAft>
-                <a:spcPts val="700"/>
-              </a:spcAft>
-            </a:pPr>
-            <a:r>
-              <a:rPr sz="2000" b="1" i="0">
-                <a:solidFill>
-                  <a:srgbClr val="97BC62"/>
-                </a:solidFill>
-                <a:latin typeface="Calibri"/>
-              </a:rPr>
-              <a:t>5   </a:t>
-            </a:r>
-            <a:r>
-              <a:rPr sz="2000" b="0" i="0">
-                <a:solidFill>
-                  <a:srgbClr val="222B22"/>
-                </a:solidFill>
-                <a:latin typeface="Calibri"/>
-              </a:rPr>
-              <a:t>Blessings — specific, witnessed, short</a:t>
-            </a:r>
-          </a:p>
-          <a:p>
-            <a:pPr marL="685800" indent="-274320">
-              <a:spcAft>
-                <a:spcPts val="700"/>
-              </a:spcAft>
-            </a:pPr>
-            <a:r>
-              <a:rPr sz="2000" b="1" i="0">
-                <a:solidFill>
-                  <a:srgbClr val="97BC62"/>
-                </a:solidFill>
-                <a:latin typeface="Calibri"/>
-              </a:rPr>
-              <a:t>6   </a:t>
-            </a:r>
-            <a:r>
-              <a:rPr sz="2000" b="0" i="0">
-                <a:solidFill>
-                  <a:srgbClr val="222B22"/>
-                </a:solidFill>
-                <a:latin typeface="Calibri"/>
-              </a:rPr>
-              <a:t>Closing prayer — and the Aaronic blessing, spoken over each other, face to face</a:t>
+              <a:t>“The team is here. But the practice is ours now.”</a:t>
             </a:r>
           </a:p>
         </p:txBody>
@@ -6976,7 +6957,7 @@
         <p:spPr>
           <a:xfrm>
             <a:off x="6766560" y="1737360"/>
-            <a:ext cx="4663440" cy="2926080"/>
+            <a:ext cx="4663440" cy="2194560"/>
           </a:xfrm>
           <a:prstGeom prst="rect">
             <a:avLst/>
@@ -7001,7 +6982,7 @@
                 </a:solidFill>
                 <a:latin typeface="Calibri"/>
               </a:rPr>
-              <a:t>THE AARONIC BLESSING — NUMBERS 6:24–26</a:t>
+              <a:t>1 TIMOTHY 4:12</a:t>
             </a:r>
           </a:p>
           <a:p>
@@ -7017,39 +6998,7 @@
                 </a:solidFill>
                 <a:latin typeface="Cambria"/>
               </a:rPr>
-              <a:t>“The Lord bless you and keep you;</a:t>
-            </a:r>
-          </a:p>
-          <a:p>
-            <a:pPr>
-              <a:spcAft>
-                <a:spcPts val="600"/>
-              </a:spcAft>
-            </a:pPr>
-            <a:r>
-              <a:rPr sz="2400" b="0" i="1">
-                <a:solidFill>
-                  <a:srgbClr val="222B22"/>
-                </a:solidFill>
-                <a:latin typeface="Cambria"/>
-              </a:rPr>
-              <a:t>the Lord make his face to shine upon you, and be gracious to you;</a:t>
-            </a:r>
-          </a:p>
-          <a:p>
-            <a:pPr>
-              <a:spcAft>
-                <a:spcPts val="600"/>
-              </a:spcAft>
-            </a:pPr>
-            <a:r>
-              <a:rPr sz="2400" b="0" i="1">
-                <a:solidFill>
-                  <a:srgbClr val="222B22"/>
-                </a:solidFill>
-                <a:latin typeface="Cambria"/>
-              </a:rPr>
-              <a:t>the Lord lift up his countenance upon you, and give you peace.”</a:t>
+              <a:t>“Let no one despise you for your youth, but set the believers an example in speech, in conduct, in love, in faith, in purity.”</a:t>
             </a:r>
           </a:p>
         </p:txBody>
@@ -7076,7 +7025,7 @@
           <a:p>
             <a:pPr algn="r"/>
             <a:r>
-              <a:t>183</a:t>
+              <a:t>181</a:t>
             </a:r>
             <a:endParaRPr sz="1000" b="1">
               <a:solidFill>
@@ -7095,8 +7044,8 @@
 </p:sld>
 </file>
 
-<file path=ppt/slides/slide9.xml><?xml version="1.0" encoding="utf-8"?>
-<p:sld xmlns:a="http://schemas.openxmlformats.org/drawingml/2006/main" xmlns:r="http://schemas.openxmlformats.org/officeDocument/2006/relationships" xmlns:p="http://schemas.openxmlformats.org/presentationml/2006/main">
+<file path=ppt/slides/slide8.xml><?xml version="1.0" encoding="utf-8"?>
+<p:sld xmlns:a="http://schemas.openxmlformats.org/drawingml/2006/main" xmlns:p="http://schemas.openxmlformats.org/presentationml/2006/main" xmlns:r="http://schemas.openxmlformats.org/officeDocument/2006/relationships">
   <p:cSld>
     <p:spTree>
       <p:nvGrpSpPr>
@@ -7104,14 +7053,7 @@
         <p:cNvGrpSpPr/>
         <p:nvPr/>
       </p:nvGrpSpPr>
-      <p:grpSpPr>
-        <a:xfrm>
-          <a:off x="0" y="0"/>
-          <a:ext cx="0" cy="0"/>
-          <a:chOff x="0" y="0"/>
-          <a:chExt cx="0" cy="0"/>
-        </a:xfrm>
-      </p:grpSpPr>
+      <p:grpSpPr/>
       <p:sp>
         <p:nvSpPr>
           <p:cNvPr id="2" name="Rectangle 1"/>
@@ -7121,7 +7063,7 @@
         <p:spPr>
           <a:xfrm>
             <a:off x="0" y="0"/>
-            <a:ext cx="12191695" cy="6858000"/>
+            <a:ext cx="12192000" cy="6858000"/>
           </a:xfrm>
           <a:prstGeom prst="rect">
             <a:avLst/>
@@ -7132,12 +7074,27 @@
           <a:ln>
             <a:noFill/>
           </a:ln>
+          <a:effectLst/>
         </p:spPr>
-        <p:txBody>
-          <a:bodyPr/>
-          <a:lstStyle/>
-          <a:p>
-            <a:endParaRPr/>
+        <p:style>
+          <a:lnRef idx="1">
+            <a:schemeClr val="accent1"/>
+          </a:lnRef>
+          <a:fillRef idx="3">
+            <a:schemeClr val="accent1"/>
+          </a:fillRef>
+          <a:effectRef idx="2">
+            <a:schemeClr val="accent1"/>
+          </a:effectRef>
+          <a:fontRef idx="minor">
+            <a:schemeClr val="lt1"/>
+          </a:fontRef>
+        </p:style>
+        <p:txBody>
+          <a:bodyPr rtlCol="0" anchor="ctr"/>
+          <a:lstStyle/>
+          <a:p>
+            <a:pPr algn="ctr"/>
           </a:p>
         </p:txBody>
       </p:sp>
@@ -7163,33 +7120,57 @@
           </a:bodyPr>
           <a:lstStyle/>
           <a:p>
-            <a:pPr algn="l">
-              <a:spcAft>
-                <a:spcPts val="600"/>
-              </a:spcAft>
-            </a:pPr>
-            <a:r>
-              <a:rPr sz="2800" b="1" i="0">
+            <a:r>
+              <a:rPr sz="2800" b="1">
                 <a:solidFill>
                   <a:srgbClr val="2C5F2D"/>
                 </a:solidFill>
                 <a:latin typeface="Cambria"/>
               </a:rPr>
-              <a:t>The Leader Feedback Round</a:t>
-            </a:r>
-          </a:p>
-        </p:txBody>
-      </p:sp>
-      <p:sp>
-        <p:nvSpPr>
-          <p:cNvPr id="4" name="TextBox 4"/>
+              <a:t>The Take-Home Sheet — the Daily Rhythm</a:t>
+            </a:r>
+          </a:p>
+        </p:txBody>
+      </p:sp>
+      <p:pic>
+        <p:nvPicPr>
+          <p:cNvPr id="4" name="Picture 3" descr="s14_part1.png"/>
+          <p:cNvPicPr>
+            <a:picLocks noChangeAspect="1"/>
+          </p:cNvPicPr>
+          <p:nvPr/>
+        </p:nvPicPr>
+        <p:blipFill>
+          <a:blip r:embed="rId2"/>
+          <a:stretch>
+            <a:fillRect/>
+          </a:stretch>
+        </p:blipFill>
+        <p:spPr>
+          <a:xfrm>
+            <a:off x="1798167" y="1463040"/>
+            <a:ext cx="8595360" cy="4039819"/>
+          </a:xfrm>
+          <a:prstGeom prst="rect">
+            <a:avLst/>
+          </a:prstGeom>
+          <a:ln w="12700">
+            <a:solidFill>
+              <a:srgbClr val="C8C8C8"/>
+            </a:solidFill>
+          </a:ln>
+        </p:spPr>
+      </p:pic>
+      <p:sp>
+        <p:nvSpPr>
+          <p:cNvPr id="5" name="TextBox 4"/>
           <p:cNvSpPr txBox="1"/>
           <p:nvPr/>
         </p:nvSpPr>
         <p:spPr>
           <a:xfrm>
-            <a:off x="822960" y="1554480"/>
-            <a:ext cx="6675120" cy="4892040"/>
+            <a:off x="822960" y="6355080"/>
+            <a:ext cx="10515600" cy="411480"/>
           </a:xfrm>
           <a:prstGeom prst="rect">
             <a:avLst/>
@@ -7197,156 +7178,19 @@
           <a:noFill/>
         </p:spPr>
         <p:txBody>
-          <a:bodyPr wrap="square" lIns="91440" tIns="91440" rIns="91440" bIns="91440"/>
-          <a:lstStyle/>
-          <a:p>
-            <a:pPr marL="274320" indent="-274320">
-              <a:spcAft>
-                <a:spcPts val="900"/>
-              </a:spcAft>
-            </a:pPr>
-            <a:r>
-              <a:rPr sz="2800" b="1" i="0">
-                <a:solidFill>
-                  <a:srgbClr val="97BC62"/>
-                </a:solidFill>
-                <a:latin typeface="Calibri"/>
-              </a:rPr>
-              <a:t>•  </a:t>
-            </a:r>
-            <a:r>
-              <a:rPr sz="2800" b="0" i="0">
-                <a:solidFill>
-                  <a:srgbClr val="222B22"/>
-                </a:solidFill>
-                <a:latin typeface="Calibri"/>
-              </a:rPr>
-              <a:t>Two rounds, same as every session — the container holder first, then the content presenter: three things each</a:t>
-            </a:r>
-          </a:p>
-          <a:p>
-            <a:pPr marL="685800" indent="-274320">
-              <a:spcAft>
-                <a:spcPts val="700"/>
-              </a:spcAft>
-            </a:pPr>
-            <a:r>
-              <a:rPr sz="2000" b="1" i="0">
-                <a:solidFill>
-                  <a:srgbClr val="97BC62"/>
-                </a:solidFill>
-                <a:latin typeface="Calibri"/>
-              </a:rPr>
-              <a:t>–  </a:t>
-            </a:r>
-            <a:r>
-              <a:rPr sz="2000" b="0" i="1">
-                <a:solidFill>
-                  <a:srgbClr val="222B22"/>
-                </a:solidFill>
-                <a:latin typeface="Calibri"/>
-              </a:rPr>
-              <a:t>“What I think went well tonight: ______”</a:t>
-            </a:r>
-          </a:p>
-          <a:p>
-            <a:pPr marL="685800" indent="-274320">
-              <a:spcAft>
-                <a:spcPts val="700"/>
-              </a:spcAft>
-            </a:pPr>
-            <a:r>
-              <a:rPr sz="2000" b="1" i="0">
-                <a:solidFill>
-                  <a:srgbClr val="97BC62"/>
-                </a:solidFill>
-                <a:latin typeface="Calibri"/>
-              </a:rPr>
-              <a:t>–  </a:t>
-            </a:r>
-            <a:r>
-              <a:rPr sz="2000" b="0" i="1">
-                <a:solidFill>
-                  <a:srgbClr val="222B22"/>
-                </a:solidFill>
-                <a:latin typeface="Calibri"/>
-              </a:rPr>
-              <a:t>“What I’d do differently next time: ______”</a:t>
-            </a:r>
-          </a:p>
-          <a:p>
-            <a:pPr marL="685800" indent="-274320">
-              <a:spcAft>
-                <a:spcPts val="700"/>
-              </a:spcAft>
-            </a:pPr>
-            <a:r>
-              <a:rPr sz="2000" b="1" i="0">
-                <a:solidFill>
-                  <a:srgbClr val="97BC62"/>
-                </a:solidFill>
-                <a:latin typeface="Calibri"/>
-              </a:rPr>
-              <a:t>–  </a:t>
-            </a:r>
-            <a:r>
-              <a:rPr sz="2000" b="0" i="1">
-                <a:solidFill>
-                  <a:srgbClr val="222B22"/>
-                </a:solidFill>
-                <a:latin typeface="Calibri"/>
-              </a:rPr>
-              <a:t>“If I were to teach tonight’s process to someone, I would tell them: ______”</a:t>
-            </a:r>
-          </a:p>
-          <a:p>
-            <a:pPr marL="274320" indent="-274320">
-              <a:spcAft>
-                <a:spcPts val="900"/>
-              </a:spcAft>
-            </a:pPr>
-            <a:r>
-              <a:rPr sz="2800" b="1" i="0">
-                <a:solidFill>
-                  <a:srgbClr val="97BC62"/>
-                </a:solidFill>
-                <a:latin typeface="Calibri"/>
-              </a:rPr>
-              <a:t>•  </a:t>
-            </a:r>
-            <a:r>
-              <a:rPr sz="2800" b="0" i="0">
-                <a:solidFill>
-                  <a:srgbClr val="222B22"/>
-                </a:solidFill>
-                <a:latin typeface="Calibri"/>
-              </a:rPr>
-              <a:t>Then the room — the same two questions about tonight</a:t>
-            </a:r>
-          </a:p>
-          <a:p>
-            <a:pPr marL="274320" indent="-274320">
-              <a:spcAft>
-                <a:spcPts val="900"/>
-              </a:spcAft>
-            </a:pPr>
-            <a:r>
-              <a:rPr sz="2800" b="1" i="0">
-                <a:solidFill>
-                  <a:srgbClr val="97BC62"/>
-                </a:solidFill>
-                <a:latin typeface="Calibri"/>
-              </a:rPr>
-              <a:t>•  </a:t>
-            </a:r>
-            <a:r>
-              <a:rPr sz="2800" b="0" i="0">
-                <a:solidFill>
-                  <a:srgbClr val="222B22"/>
-                </a:solidFill>
-                <a:latin typeface="Calibri"/>
-              </a:rPr>
-              <a:t>The leaders receive without defending — “thank you” is the whole response</a:t>
+          <a:bodyPr wrap="square">
+            <a:spAutoFit/>
+          </a:bodyPr>
+          <a:lstStyle/>
+          <a:p>
+            <a:r>
+              <a:rPr sz="1400" i="1">
+                <a:solidFill>
+                  <a:srgbClr val="595959"/>
+                </a:solidFill>
+                <a:latin typeface="Calibri"/>
+              </a:rPr>
+              <a:t>Handed out now — this is the sheet in your hands.</a:t>
             </a:r>
           </a:p>
         </p:txBody>
@@ -7373,7 +7217,7 @@
           <a:p>
             <a:pPr algn="r"/>
             <a:r>
-              <a:t>184</a:t>
+              <a:t>182</a:t>
             </a:r>
             <a:endParaRPr sz="1000" b="1">
               <a:solidFill>
@@ -7384,42 +7228,198 @@
           </a:p>
         </p:txBody>
       </p:sp>
+    </p:spTree>
+  </p:cSld>
+  <p:clrMapOvr>
+    <a:masterClrMapping/>
+  </p:clrMapOvr>
+</p:sld>
+</file>
+
+<file path=ppt/slides/slide9.xml><?xml version="1.0" encoding="utf-8"?>
+<p:sld xmlns:a="http://schemas.openxmlformats.org/drawingml/2006/main" xmlns:p="http://schemas.openxmlformats.org/presentationml/2006/main" xmlns:r="http://schemas.openxmlformats.org/officeDocument/2006/relationships">
+  <p:cSld>
+    <p:spTree>
+      <p:nvGrpSpPr>
+        <p:cNvPr id="1" name=""/>
+        <p:cNvGrpSpPr/>
+        <p:nvPr/>
+      </p:nvGrpSpPr>
+      <p:grpSpPr/>
+      <p:sp>
+        <p:nvSpPr>
+          <p:cNvPr id="2" name="Rectangle 1"/>
+          <p:cNvSpPr/>
+          <p:nvPr/>
+        </p:nvSpPr>
+        <p:spPr>
+          <a:xfrm>
+            <a:off x="0" y="0"/>
+            <a:ext cx="12192000" cy="6858000"/>
+          </a:xfrm>
+          <a:prstGeom prst="rect">
+            <a:avLst/>
+          </a:prstGeom>
+          <a:solidFill>
+            <a:srgbClr val="FFFFFF"/>
+          </a:solidFill>
+          <a:ln>
+            <a:noFill/>
+          </a:ln>
+          <a:effectLst/>
+        </p:spPr>
+        <p:style>
+          <a:lnRef idx="1">
+            <a:schemeClr val="accent1"/>
+          </a:lnRef>
+          <a:fillRef idx="3">
+            <a:schemeClr val="accent1"/>
+          </a:fillRef>
+          <a:effectRef idx="2">
+            <a:schemeClr val="accent1"/>
+          </a:effectRef>
+          <a:fontRef idx="minor">
+            <a:schemeClr val="lt1"/>
+          </a:fontRef>
+        </p:style>
+        <p:txBody>
+          <a:bodyPr rtlCol="0" anchor="ctr"/>
+          <a:lstStyle/>
+          <a:p>
+            <a:pPr algn="ctr"/>
+          </a:p>
+        </p:txBody>
+      </p:sp>
+      <p:sp>
+        <p:nvSpPr>
+          <p:cNvPr id="3" name="TextBox 2"/>
+          <p:cNvSpPr txBox="1"/>
+          <p:nvPr/>
+        </p:nvSpPr>
+        <p:spPr>
+          <a:xfrm>
+            <a:off x="822960" y="502920"/>
+            <a:ext cx="10515600" cy="822960"/>
+          </a:xfrm>
+          <a:prstGeom prst="rect">
+            <a:avLst/>
+          </a:prstGeom>
+          <a:noFill/>
+        </p:spPr>
+        <p:txBody>
+          <a:bodyPr wrap="square">
+            <a:spAutoFit/>
+          </a:bodyPr>
+          <a:lstStyle/>
+          <a:p>
+            <a:r>
+              <a:rPr sz="2800" b="1">
+                <a:solidFill>
+                  <a:srgbClr val="2C5F2D"/>
+                </a:solidFill>
+                <a:latin typeface="Cambria"/>
+              </a:rPr>
+              <a:t>The Take-Home Sheet — the Four Parts</a:t>
+            </a:r>
+          </a:p>
+        </p:txBody>
+      </p:sp>
       <p:pic>
         <p:nvPicPr>
-          <p:cNvPr id="33" name="Picture 33" descr="compass on the trail - the weekly bearing check"/>
+          <p:cNvPr id="4" name="Picture 3" descr="s14_part2.png"/>
           <p:cNvPicPr>
             <a:picLocks noChangeAspect="1"/>
           </p:cNvPicPr>
           <p:nvPr/>
         </p:nvPicPr>
         <p:blipFill>
-          <a:blip r:embed="rId3"/>
+          <a:blip r:embed="rId2"/>
           <a:stretch>
             <a:fillRect/>
           </a:stretch>
         </p:blipFill>
         <p:spPr>
           <a:xfrm>
-            <a:off x="8106160" y="1463040"/>
-            <a:ext cx="3259831" cy="4892040"/>
+            <a:off x="2433167" y="1463040"/>
+            <a:ext cx="7325360" cy="4709160"/>
           </a:xfrm>
           <a:prstGeom prst="rect">
             <a:avLst/>
           </a:prstGeom>
-          <a:ln w="76200">
+          <a:ln w="12700">
             <a:solidFill>
-              <a:srgbClr val="FFFFFF"/>
+              <a:srgbClr val="C8C8C8"/>
             </a:solidFill>
           </a:ln>
-          <a:effectLst>
-            <a:outerShdw blurRad="63500" dist="25400" dir="5400000" rotWithShape="0">
-              <a:srgbClr val="000000">
-                <a:alpha val="35000"/>
-              </a:srgbClr>
-            </a:outerShdw>
-          </a:effectLst>
         </p:spPr>
       </p:pic>
+      <p:sp>
+        <p:nvSpPr>
+          <p:cNvPr id="5" name="TextBox 4"/>
+          <p:cNvSpPr txBox="1"/>
+          <p:nvPr/>
+        </p:nvSpPr>
+        <p:spPr>
+          <a:xfrm>
+            <a:off x="822960" y="6355080"/>
+            <a:ext cx="10515600" cy="411480"/>
+          </a:xfrm>
+          <a:prstGeom prst="rect">
+            <a:avLst/>
+          </a:prstGeom>
+          <a:noFill/>
+        </p:spPr>
+        <p:txBody>
+          <a:bodyPr wrap="square">
+            <a:spAutoFit/>
+          </a:bodyPr>
+          <a:lstStyle/>
+          <a:p>
+            <a:r>
+              <a:rPr sz="1400" i="1">
+                <a:solidFill>
+                  <a:srgbClr val="595959"/>
+                </a:solidFill>
+                <a:latin typeface="Calibri"/>
+              </a:rPr>
+              <a:t>One practice at a time — and a partner expecting you at the end of week one.</a:t>
+            </a:r>
+          </a:p>
+        </p:txBody>
+      </p:sp>
+      <p:sp>
+        <p:nvSpPr>
+          <p:cNvPr id="90" name="SlideNum"/>
+          <p:cNvSpPr txBox="1"/>
+          <p:nvPr/>
+        </p:nvSpPr>
+        <p:spPr>
+          <a:xfrm>
+            <a:off x="11384280" y="6446520"/>
+            <a:ext cx="640080" cy="292608"/>
+          </a:xfrm>
+          <a:prstGeom prst="rect">
+            <a:avLst/>
+          </a:prstGeom>
+          <a:noFill/>
+        </p:spPr>
+        <p:txBody>
+          <a:bodyPr wrap="none" lIns="0" tIns="0" rIns="45720" bIns="0" anchor="ctr"/>
+          <a:lstStyle/>
+          <a:p>
+            <a:pPr algn="r"/>
+            <a:r>
+              <a:t>182a</a:t>
+            </a:r>
+            <a:endParaRPr sz="1000" b="1">
+              <a:solidFill>
+                <a:srgbClr val="7A8A6E"/>
+              </a:solidFill>
+              <a:latin typeface="Calibri"/>
+            </a:endParaRPr>
+          </a:p>
+        </p:txBody>
+      </p:sp>
     </p:spTree>
   </p:cSld>
   <p:clrMapOvr>

--- a/_implementation-notes/evening-series/FotH Evening Session 14 Slides DRAFT v1.pptx
+++ b/_implementation-notes/evening-series/FotH Evening Session 14 Slides DRAFT v1.pptx
@@ -5749,7 +5749,7 @@
           <p:nvPr/>
         </p:nvPicPr>
         <p:blipFill>
-          <a:blip r:embed="rId4"/>
+          <a:blip r:embed="rId5"/>
           <a:stretch>
             <a:fillRect/>
           </a:stretch>

--- a/_implementation-notes/evening-series/FotH Evening Session 14 Slides DRAFT v1.pptx
+++ b/_implementation-notes/evening-series/FotH Evening Session 14 Slides DRAFT v1.pptx
@@ -4966,7 +4966,7 @@
           <a:p>
             <a:pPr algn="r"/>
             <a:r>
-              <a:t>183</a:t>
+              <a:t>211</a:t>
             </a:r>
             <a:endParaRPr sz="1000" b="1">
               <a:solidFill>
@@ -5263,7 +5263,7 @@
           <a:p>
             <a:pPr algn="r"/>
             <a:r>
-              <a:t>184</a:t>
+              <a:t>212</a:t>
             </a:r>
             <a:endParaRPr sz="1000" b="1">
               <a:solidFill>
@@ -5512,7 +5512,7 @@
           <a:p>
             <a:pPr algn="r"/>
             <a:r>
-              <a:t>177</a:t>
+              <a:t>203</a:t>
             </a:r>
             <a:endParaRPr sz="1000" b="1">
               <a:solidFill>
@@ -5729,7 +5729,7 @@
           <a:p>
             <a:pPr algn="r"/>
             <a:r>
-              <a:t>177a</a:t>
+              <a:t>204</a:t>
             </a:r>
             <a:endParaRPr sz="1000" b="1">
               <a:solidFill>
@@ -6068,7 +6068,7 @@
           <a:p>
             <a:pPr algn="r"/>
             <a:r>
-              <a:t>178</a:t>
+              <a:t>205</a:t>
             </a:r>
             <a:endParaRPr sz="1000" b="1">
               <a:solidFill>
@@ -6451,7 +6451,7 @@
           <a:p>
             <a:pPr algn="r"/>
             <a:r>
-              <a:t>179</a:t>
+              <a:t>206</a:t>
             </a:r>
             <a:endParaRPr sz="1000" b="1">
               <a:solidFill>
@@ -6698,7 +6698,7 @@
           <a:p>
             <a:pPr algn="r"/>
             <a:r>
-              <a:t>180</a:t>
+              <a:t>207</a:t>
             </a:r>
             <a:endParaRPr sz="1000" b="1">
               <a:solidFill>
@@ -7025,7 +7025,7 @@
           <a:p>
             <a:pPr algn="r"/>
             <a:r>
-              <a:t>181</a:t>
+              <a:t>208</a:t>
             </a:r>
             <a:endParaRPr sz="1000" b="1">
               <a:solidFill>
@@ -7217,7 +7217,7 @@
           <a:p>
             <a:pPr algn="r"/>
             <a:r>
-              <a:t>182</a:t>
+              <a:t>209</a:t>
             </a:r>
             <a:endParaRPr sz="1000" b="1">
               <a:solidFill>
@@ -7409,7 +7409,7 @@
           <a:p>
             <a:pPr algn="r"/>
             <a:r>
-              <a:t>182a</a:t>
+              <a:t>210</a:t>
             </a:r>
             <a:endParaRPr sz="1000" b="1">
               <a:solidFill>

--- a/_implementation-notes/evening-series/FotH Evening Session 14 Slides DRAFT v1.pptx
+++ b/_implementation-notes/evening-series/FotH Evening Session 14 Slides DRAFT v1.pptx
@@ -5749,7 +5749,7 @@
           <p:nvPr/>
         </p:nvPicPr>
         <p:blipFill>
-          <a:blip r:embed="rId5"/>
+          <a:blip r:embed="rId6"/>
           <a:stretch>
             <a:fillRect/>
           </a:stretch>

--- a/_implementation-notes/evening-series/FotH Evening Session 14 Slides DRAFT v1.pptx
+++ b/_implementation-notes/evening-series/FotH Evening Session 14 Slides DRAFT v1.pptx
@@ -1293,7 +1293,7 @@
           <a:p>
             <a:r>
               <a:rPr lang="en-US" sz="1200"/>
-              <a:t>W14 · 5:19–5:23, blessing 5:27–5:30 · TEEN-LED</a:t>
+              <a:t>W14 · 8:24–8:26, blessing 8:29–8:30 · TEEN-LED</a:t>
             </a:r>
           </a:p>
           <a:p>
@@ -1352,7 +1352,7 @@
           <a:p>
             <a:r>
               <a:rPr lang="en-US" sz="1200"/>
-              <a:t>S14 · 8:24–8:28 · LEAD: BOTH LEADERS (Lead Companion runs)</a:t>
+              <a:t>S14 · 8:26–8:29 · LEAD: BOTH LEADERS (Lead Companion runs)</a:t>
             </a:r>
           </a:p>
           <a:p>

--- a/_implementation-notes/evening-series/FotH Evening Session 14 Slides DRAFT v1.pptx
+++ b/_implementation-notes/evening-series/FotH Evening Session 14 Slides DRAFT v1.pptx
@@ -4966,7 +4966,7 @@
           <a:p>
             <a:pPr algn="r"/>
             <a:r>
-              <a:t>211</a:t>
+              <a:t>212</a:t>
             </a:r>
             <a:endParaRPr sz="1000" b="1">
               <a:solidFill>
@@ -5263,7 +5263,7 @@
           <a:p>
             <a:pPr algn="r"/>
             <a:r>
-              <a:t>212</a:t>
+              <a:t>213</a:t>
             </a:r>
             <a:endParaRPr sz="1000" b="1">
               <a:solidFill>
@@ -5512,7 +5512,7 @@
           <a:p>
             <a:pPr algn="r"/>
             <a:r>
-              <a:t>203</a:t>
+              <a:t>204</a:t>
             </a:r>
             <a:endParaRPr sz="1000" b="1">
               <a:solidFill>
@@ -5729,7 +5729,7 @@
           <a:p>
             <a:pPr algn="r"/>
             <a:r>
-              <a:t>204</a:t>
+              <a:t>205</a:t>
             </a:r>
             <a:endParaRPr sz="1000" b="1">
               <a:solidFill>
@@ -6068,7 +6068,7 @@
           <a:p>
             <a:pPr algn="r"/>
             <a:r>
-              <a:t>205</a:t>
+              <a:t>206</a:t>
             </a:r>
             <a:endParaRPr sz="1000" b="1">
               <a:solidFill>
@@ -6451,7 +6451,7 @@
           <a:p>
             <a:pPr algn="r"/>
             <a:r>
-              <a:t>206</a:t>
+              <a:t>207</a:t>
             </a:r>
             <a:endParaRPr sz="1000" b="1">
               <a:solidFill>
@@ -6698,7 +6698,7 @@
           <a:p>
             <a:pPr algn="r"/>
             <a:r>
-              <a:t>207</a:t>
+              <a:t>208</a:t>
             </a:r>
             <a:endParaRPr sz="1000" b="1">
               <a:solidFill>
@@ -7025,7 +7025,7 @@
           <a:p>
             <a:pPr algn="r"/>
             <a:r>
-              <a:t>208</a:t>
+              <a:t>209</a:t>
             </a:r>
             <a:endParaRPr sz="1000" b="1">
               <a:solidFill>
@@ -7217,7 +7217,7 @@
           <a:p>
             <a:pPr algn="r"/>
             <a:r>
-              <a:t>209</a:t>
+              <a:t>210</a:t>
             </a:r>
             <a:endParaRPr sz="1000" b="1">
               <a:solidFill>
@@ -7409,7 +7409,7 @@
           <a:p>
             <a:pPr algn="r"/>
             <a:r>
-              <a:t>210</a:t>
+              <a:t>211</a:t>
             </a:r>
             <a:endParaRPr sz="1000" b="1">
               <a:solidFill>

--- a/_implementation-notes/evening-series/FotH Evening Session 14 Slides DRAFT v1.pptx
+++ b/_implementation-notes/evening-series/FotH Evening Session 14 Slides DRAFT v1.pptx
@@ -7333,15 +7333,15 @@
           <p:nvPr/>
         </p:nvPicPr>
         <p:blipFill>
-          <a:blip r:embed="rId2"/>
+          <a:blip r:embed="rId4"/>
           <a:stretch>
             <a:fillRect/>
           </a:stretch>
         </p:blipFill>
         <p:spPr>
           <a:xfrm>
-            <a:off x="2433167" y="1463040"/>
-            <a:ext cx="7325360" cy="4709160"/>
+            <a:off x="2809295" y="1463040"/>
+            <a:ext cx="6573104" cy="4709160"/>
           </a:xfrm>
           <a:prstGeom prst="rect">
             <a:avLst/>

--- a/_implementation-notes/evening-series/FotH Evening Session 14 Slides DRAFT v1.pptx
+++ b/_implementation-notes/evening-series/FotH Evening Session 14 Slides DRAFT v1.pptx
@@ -1292,20 +1292,22 @@
           <a:lstStyle/>
           <a:p>
             <a:r>
-              <a:rPr lang="en-US" sz="1200"/>
               <a:t>W14 · 8:24–8:26, blessing 8:29–8:30 · TEEN-LED</a:t>
             </a:r>
           </a:p>
           <a:p>
             <a:r>
-              <a:rPr lang="en-US" sz="1200"/>
               <a:t>BEATS: 1. The teen runs the closing protocol: standing circle, one-word landing, the one thing, the one practice spoken aloud. 2. After the feedback round the teen returns for the send: when we gather is the Rhythm night — today was a rep of exactly that, the practice working without the team at the front. 3. Aaronic blessing, hands up; sent.</a:t>
             </a:r>
           </a:p>
           <a:p>
             <a:r>
-              <a:rPr lang="en-US" sz="1200"/>
               <a:t>CUES: In Option 2, closing from memory completes the container half of the rep — let the teen carry all of it.</a:t>
+            </a:r>
+          </a:p>
+          <a:p>
+            <a:r>
+              <a:t>BLESSINGS: eyes on the person, not the screen — nothing to read; say what is on your heart for them, specific and short.</a:t>
             </a:r>
           </a:p>
         </p:txBody>
@@ -4827,7 +4829,7 @@
                 </a:solidFill>
                 <a:latin typeface="Calibri"/>
               </a:rPr>
-              <a:t>Blessings — specific, witnessed, short</a:t>
+              <a:t>Blessings — eyes on the person, not the screen: say what is on your heart for them. Specific, witnessed, short</a:t>
             </a:r>
           </a:p>
           <a:p>

--- a/_implementation-notes/evening-series/FotH Evening Session 14 Slides DRAFT v1.pptx
+++ b/_implementation-notes/evening-series/FotH Evening Session 14 Slides DRAFT v1.pptx
@@ -4968,7 +4968,7 @@
           <a:p>
             <a:pPr algn="r"/>
             <a:r>
-              <a:t>212</a:t>
+              <a:t>213</a:t>
             </a:r>
             <a:endParaRPr sz="1000" b="1">
               <a:solidFill>
@@ -5265,7 +5265,7 @@
           <a:p>
             <a:pPr algn="r"/>
             <a:r>
-              <a:t>213</a:t>
+              <a:t>214</a:t>
             </a:r>
             <a:endParaRPr sz="1000" b="1">
               <a:solidFill>
@@ -5514,7 +5514,7 @@
           <a:p>
             <a:pPr algn="r"/>
             <a:r>
-              <a:t>204</a:t>
+              <a:t>205</a:t>
             </a:r>
             <a:endParaRPr sz="1000" b="1">
               <a:solidFill>
@@ -5731,7 +5731,7 @@
           <a:p>
             <a:pPr algn="r"/>
             <a:r>
-              <a:t>205</a:t>
+              <a:t>206</a:t>
             </a:r>
             <a:endParaRPr sz="1000" b="1">
               <a:solidFill>
@@ -6070,7 +6070,7 @@
           <a:p>
             <a:pPr algn="r"/>
             <a:r>
-              <a:t>206</a:t>
+              <a:t>207</a:t>
             </a:r>
             <a:endParaRPr sz="1000" b="1">
               <a:solidFill>
@@ -6453,7 +6453,7 @@
           <a:p>
             <a:pPr algn="r"/>
             <a:r>
-              <a:t>207</a:t>
+              <a:t>208</a:t>
             </a:r>
             <a:endParaRPr sz="1000" b="1">
               <a:solidFill>
@@ -6700,7 +6700,7 @@
           <a:p>
             <a:pPr algn="r"/>
             <a:r>
-              <a:t>208</a:t>
+              <a:t>209</a:t>
             </a:r>
             <a:endParaRPr sz="1000" b="1">
               <a:solidFill>
@@ -7027,7 +7027,7 @@
           <a:p>
             <a:pPr algn="r"/>
             <a:r>
-              <a:t>209</a:t>
+              <a:t>210</a:t>
             </a:r>
             <a:endParaRPr sz="1000" b="1">
               <a:solidFill>
@@ -7219,7 +7219,7 @@
           <a:p>
             <a:pPr algn="r"/>
             <a:r>
-              <a:t>210</a:t>
+              <a:t>211</a:t>
             </a:r>
             <a:endParaRPr sz="1000" b="1">
               <a:solidFill>
@@ -7411,7 +7411,7 @@
           <a:p>
             <a:pPr algn="r"/>
             <a:r>
-              <a:t>211</a:t>
+              <a:t>212</a:t>
             </a:r>
             <a:endParaRPr sz="1000" b="1">
               <a:solidFill>
